--- a/templates/posts/october/2026-10-05-mon-ig-teachers-day-trading-cards.pptx
+++ b/templates/posts/october/2026-10-05-mon-ig-teachers-day-trading-cards.pptx
@@ -4322,12 +4322,20 @@
           </a:p>
         </p:txBody>
       </p:sp>
-      <p:sp>
-        <p:nvSpPr>
-          <p:cNvPr id="4" name="Rectangle 3"/>
-          <p:cNvSpPr/>
-          <p:nvPr/>
-        </p:nvSpPr>
+      <p:pic>
+        <p:nvPicPr>
+          <p:cNvPr id="4" name="Picture 3" descr="4511350508822684179.jpg"/>
+          <p:cNvPicPr>
+            <a:picLocks noChangeAspect="1"/>
+          </p:cNvPicPr>
+          <p:nvPr/>
+        </p:nvPicPr>
+        <p:blipFill>
+          <a:blip r:embed="rId3"/>
+          <a:stretch>
+            <a:fillRect/>
+          </a:stretch>
+        </p:blipFill>
         <p:spPr>
           <a:xfrm rot="180000">
             <a:off x="1695970" y="1290848"/>
@@ -4336,78 +4344,11 @@
           <a:prstGeom prst="rect">
             <a:avLst/>
           </a:prstGeom>
-          <a:solidFill>
-            <a:srgbClr val="C9C4B8"/>
-          </a:solidFill>
-          <a:ln>
-            <a:noFill/>
-          </a:ln>
-          <a:effectLst/>
-        </p:spPr>
-        <p:style>
-          <a:lnRef idx="1">
-            <a:schemeClr val="accent1"/>
-          </a:lnRef>
-          <a:fillRef idx="3">
-            <a:schemeClr val="accent1"/>
-          </a:fillRef>
-          <a:effectRef idx="2">
-            <a:schemeClr val="accent1"/>
-          </a:effectRef>
-          <a:fontRef idx="minor">
-            <a:schemeClr val="lt1"/>
-          </a:fontRef>
-        </p:style>
-        <p:txBody>
-          <a:bodyPr rtlCol="0" anchor="ctr"/>
-          <a:lstStyle/>
-          <a:p>
-            <a:pPr algn="ctr"/>
-          </a:p>
-        </p:txBody>
-      </p:sp>
-      <p:sp>
-        <p:nvSpPr>
-          <p:cNvPr id="5" name="TextBox 4"/>
-          <p:cNvSpPr txBox="1"/>
-          <p:nvPr/>
-        </p:nvSpPr>
-        <p:spPr>
-          <a:xfrm rot="180000">
-            <a:off x="1848370" y="1290848"/>
-            <a:ext cx="3314700" cy="3619500"/>
-          </a:xfrm>
-          <a:prstGeom prst="rect">
-            <a:avLst/>
-          </a:prstGeom>
-          <a:noFill/>
-        </p:spPr>
-        <p:txBody>
-          <a:bodyPr wrap="square" lIns="0" rIns="0" tIns="0" bIns="0" anchor="ctr">
-            <a:spAutoFit/>
-          </a:bodyPr>
-          <a:lstStyle/>
-          <a:p>
-            <a:pPr algn="ctr">
-              <a:lnSpc>
-                <a:spcPct val="120000"/>
-              </a:lnSpc>
-            </a:pPr>
-            <a:r>
-              <a:rPr sz="2000" b="1" i="0">
-                <a:solidFill>
-                  <a:srgbClr val="4A463F"/>
-                </a:solidFill>
-                <a:latin typeface="Source Sans 3"/>
-              </a:rPr>
-              <a:t>PHOTO: Dr. Carla Portugal, square headshot</a:t>
-            </a:r>
-          </a:p>
-        </p:txBody>
-      </p:sp>
-      <p:sp>
-        <p:nvSpPr>
-          <p:cNvPr id="6" name="Oval 5"/>
+        </p:spPr>
+      </p:pic>
+      <p:sp>
+        <p:nvSpPr>
+          <p:cNvPr id="5" name="Oval 4"/>
           <p:cNvSpPr/>
           <p:nvPr/>
         </p:nvSpPr>
@@ -4451,7 +4392,7 @@
       </p:sp>
       <p:sp>
         <p:nvSpPr>
-          <p:cNvPr id="7" name="Oval 6"/>
+          <p:cNvPr id="6" name="Oval 5"/>
           <p:cNvSpPr/>
           <p:nvPr/>
         </p:nvSpPr>
@@ -4495,7 +4436,7 @@
       </p:sp>
       <p:sp>
         <p:nvSpPr>
-          <p:cNvPr id="8" name="Oval 7"/>
+          <p:cNvPr id="7" name="Oval 6"/>
           <p:cNvSpPr/>
           <p:nvPr/>
         </p:nvSpPr>
@@ -4539,7 +4480,7 @@
       </p:sp>
       <p:sp>
         <p:nvSpPr>
-          <p:cNvPr id="9" name="Oval 8"/>
+          <p:cNvPr id="8" name="Oval 7"/>
           <p:cNvSpPr/>
           <p:nvPr/>
         </p:nvSpPr>
@@ -4583,7 +4524,7 @@
       </p:sp>
       <p:sp>
         <p:nvSpPr>
-          <p:cNvPr id="10" name="Oval 9"/>
+          <p:cNvPr id="9" name="Oval 8"/>
           <p:cNvSpPr/>
           <p:nvPr/>
         </p:nvSpPr>
@@ -4627,7 +4568,7 @@
       </p:sp>
       <p:sp>
         <p:nvSpPr>
-          <p:cNvPr id="11" name="Oval 10"/>
+          <p:cNvPr id="10" name="Oval 9"/>
           <p:cNvSpPr/>
           <p:nvPr/>
         </p:nvSpPr>
@@ -4671,7 +4612,7 @@
       </p:sp>
       <p:sp>
         <p:nvSpPr>
-          <p:cNvPr id="12" name="Oval 11"/>
+          <p:cNvPr id="11" name="Oval 10"/>
           <p:cNvSpPr/>
           <p:nvPr/>
         </p:nvSpPr>
@@ -4715,7 +4656,7 @@
       </p:sp>
       <p:sp>
         <p:nvSpPr>
-          <p:cNvPr id="13" name="Oval 12"/>
+          <p:cNvPr id="12" name="Oval 11"/>
           <p:cNvSpPr/>
           <p:nvPr/>
         </p:nvSpPr>
@@ -4759,7 +4700,7 @@
       </p:sp>
       <p:sp>
         <p:nvSpPr>
-          <p:cNvPr id="14" name="Oval 13"/>
+          <p:cNvPr id="13" name="Oval 12"/>
           <p:cNvSpPr/>
           <p:nvPr/>
         </p:nvSpPr>
@@ -4803,7 +4744,7 @@
       </p:sp>
       <p:sp>
         <p:nvSpPr>
-          <p:cNvPr id="15" name="Oval 14"/>
+          <p:cNvPr id="14" name="Oval 13"/>
           <p:cNvSpPr/>
           <p:nvPr/>
         </p:nvSpPr>
@@ -4847,7 +4788,7 @@
       </p:sp>
       <p:sp>
         <p:nvSpPr>
-          <p:cNvPr id="16" name="Oval 15"/>
+          <p:cNvPr id="15" name="Oval 14"/>
           <p:cNvSpPr/>
           <p:nvPr/>
         </p:nvSpPr>
@@ -4891,7 +4832,7 @@
       </p:sp>
       <p:sp>
         <p:nvSpPr>
-          <p:cNvPr id="17" name="Oval 16"/>
+          <p:cNvPr id="16" name="Oval 15"/>
           <p:cNvSpPr/>
           <p:nvPr/>
         </p:nvSpPr>
@@ -4935,7 +4876,7 @@
       </p:sp>
       <p:sp>
         <p:nvSpPr>
-          <p:cNvPr id="18" name="Oval 17"/>
+          <p:cNvPr id="17" name="Oval 16"/>
           <p:cNvSpPr/>
           <p:nvPr/>
         </p:nvSpPr>
@@ -4979,7 +4920,7 @@
       </p:sp>
       <p:sp>
         <p:nvSpPr>
-          <p:cNvPr id="19" name="Oval 18"/>
+          <p:cNvPr id="18" name="Oval 17"/>
           <p:cNvSpPr/>
           <p:nvPr/>
         </p:nvSpPr>
@@ -5023,7 +4964,7 @@
       </p:sp>
       <p:sp>
         <p:nvSpPr>
-          <p:cNvPr id="20" name="Oval 19"/>
+          <p:cNvPr id="19" name="Oval 18"/>
           <p:cNvSpPr/>
           <p:nvPr/>
         </p:nvSpPr>
@@ -5067,7 +5008,7 @@
       </p:sp>
       <p:sp>
         <p:nvSpPr>
-          <p:cNvPr id="21" name="Oval 20"/>
+          <p:cNvPr id="20" name="Oval 19"/>
           <p:cNvSpPr/>
           <p:nvPr/>
         </p:nvSpPr>
@@ -5111,7 +5052,7 @@
       </p:sp>
       <p:sp>
         <p:nvSpPr>
-          <p:cNvPr id="22" name="Oval 21"/>
+          <p:cNvPr id="21" name="Oval 20"/>
           <p:cNvSpPr/>
           <p:nvPr/>
         </p:nvSpPr>
@@ -5155,7 +5096,7 @@
       </p:sp>
       <p:sp>
         <p:nvSpPr>
-          <p:cNvPr id="23" name="Oval 22"/>
+          <p:cNvPr id="22" name="Oval 21"/>
           <p:cNvSpPr/>
           <p:nvPr/>
         </p:nvSpPr>
@@ -5199,7 +5140,7 @@
       </p:sp>
       <p:sp>
         <p:nvSpPr>
-          <p:cNvPr id="24" name="Oval 23"/>
+          <p:cNvPr id="23" name="Oval 22"/>
           <p:cNvSpPr/>
           <p:nvPr/>
         </p:nvSpPr>
@@ -5243,7 +5184,7 @@
       </p:sp>
       <p:sp>
         <p:nvSpPr>
-          <p:cNvPr id="25" name="Oval 24"/>
+          <p:cNvPr id="24" name="Oval 23"/>
           <p:cNvSpPr/>
           <p:nvPr/>
         </p:nvSpPr>
@@ -5287,7 +5228,7 @@
       </p:sp>
       <p:sp>
         <p:nvSpPr>
-          <p:cNvPr id="26" name="Oval 25"/>
+          <p:cNvPr id="25" name="Oval 24"/>
           <p:cNvSpPr/>
           <p:nvPr/>
         </p:nvSpPr>
@@ -5331,7 +5272,7 @@
       </p:sp>
       <p:sp>
         <p:nvSpPr>
-          <p:cNvPr id="27" name="Oval 26"/>
+          <p:cNvPr id="26" name="Oval 25"/>
           <p:cNvSpPr/>
           <p:nvPr/>
         </p:nvSpPr>
@@ -5375,7 +5316,7 @@
       </p:sp>
       <p:sp>
         <p:nvSpPr>
-          <p:cNvPr id="28" name="Oval 27"/>
+          <p:cNvPr id="27" name="Oval 26"/>
           <p:cNvSpPr/>
           <p:nvPr/>
         </p:nvSpPr>
@@ -5419,7 +5360,7 @@
       </p:sp>
       <p:sp>
         <p:nvSpPr>
-          <p:cNvPr id="29" name="Oval 28"/>
+          <p:cNvPr id="28" name="Oval 27"/>
           <p:cNvSpPr/>
           <p:nvPr/>
         </p:nvSpPr>
@@ -5463,7 +5404,7 @@
       </p:sp>
       <p:sp>
         <p:nvSpPr>
-          <p:cNvPr id="30" name="Oval 29"/>
+          <p:cNvPr id="29" name="Oval 28"/>
           <p:cNvSpPr/>
           <p:nvPr/>
         </p:nvSpPr>
@@ -5507,7 +5448,7 @@
       </p:sp>
       <p:sp>
         <p:nvSpPr>
-          <p:cNvPr id="31" name="Oval 30"/>
+          <p:cNvPr id="30" name="Oval 29"/>
           <p:cNvSpPr/>
           <p:nvPr/>
         </p:nvSpPr>
@@ -5551,7 +5492,7 @@
       </p:sp>
       <p:sp>
         <p:nvSpPr>
-          <p:cNvPr id="32" name="Oval 31"/>
+          <p:cNvPr id="31" name="Oval 30"/>
           <p:cNvSpPr/>
           <p:nvPr/>
         </p:nvSpPr>
@@ -5595,7 +5536,7 @@
       </p:sp>
       <p:sp>
         <p:nvSpPr>
-          <p:cNvPr id="33" name="Oval 32"/>
+          <p:cNvPr id="32" name="Oval 31"/>
           <p:cNvSpPr/>
           <p:nvPr/>
         </p:nvSpPr>
@@ -5639,7 +5580,7 @@
       </p:sp>
       <p:sp>
         <p:nvSpPr>
-          <p:cNvPr id="34" name="Oval 33"/>
+          <p:cNvPr id="33" name="Oval 32"/>
           <p:cNvSpPr/>
           <p:nvPr/>
         </p:nvSpPr>
@@ -5683,7 +5624,7 @@
       </p:sp>
       <p:sp>
         <p:nvSpPr>
-          <p:cNvPr id="35" name="Oval 34"/>
+          <p:cNvPr id="34" name="Oval 33"/>
           <p:cNvSpPr/>
           <p:nvPr/>
         </p:nvSpPr>
@@ -5727,7 +5668,7 @@
       </p:sp>
       <p:sp>
         <p:nvSpPr>
-          <p:cNvPr id="36" name="Oval 35"/>
+          <p:cNvPr id="35" name="Oval 34"/>
           <p:cNvSpPr/>
           <p:nvPr/>
         </p:nvSpPr>
@@ -5771,7 +5712,7 @@
       </p:sp>
       <p:sp>
         <p:nvSpPr>
-          <p:cNvPr id="37" name="Oval 36"/>
+          <p:cNvPr id="36" name="Oval 35"/>
           <p:cNvSpPr/>
           <p:nvPr/>
         </p:nvSpPr>
@@ -5815,7 +5756,7 @@
       </p:sp>
       <p:sp>
         <p:nvSpPr>
-          <p:cNvPr id="38" name="Oval 37"/>
+          <p:cNvPr id="37" name="Oval 36"/>
           <p:cNvSpPr/>
           <p:nvPr/>
         </p:nvSpPr>
@@ -5859,7 +5800,7 @@
       </p:sp>
       <p:sp>
         <p:nvSpPr>
-          <p:cNvPr id="39" name="TextBox 38"/>
+          <p:cNvPr id="38" name="TextBox 37"/>
           <p:cNvSpPr txBox="1"/>
           <p:nvPr/>
         </p:nvSpPr>
@@ -5898,7 +5839,7 @@
       </p:sp>
       <p:sp>
         <p:nvSpPr>
-          <p:cNvPr id="40" name="TextBox 39"/>
+          <p:cNvPr id="39" name="TextBox 38"/>
           <p:cNvSpPr txBox="1"/>
           <p:nvPr/>
         </p:nvSpPr>
@@ -5937,7 +5878,7 @@
       </p:sp>
       <p:sp>
         <p:nvSpPr>
-          <p:cNvPr id="41" name="TextBox 40"/>
+          <p:cNvPr id="40" name="TextBox 39"/>
           <p:cNvSpPr txBox="1"/>
           <p:nvPr/>
         </p:nvSpPr>
@@ -5976,7 +5917,7 @@
       </p:sp>
       <p:sp>
         <p:nvSpPr>
-          <p:cNvPr id="42" name="TextBox 41"/>
+          <p:cNvPr id="41" name="TextBox 40"/>
           <p:cNvSpPr txBox="1"/>
           <p:nvPr/>
         </p:nvSpPr>
@@ -6015,7 +5956,7 @@
       </p:sp>
       <p:sp>
         <p:nvSpPr>
-          <p:cNvPr id="43" name="TextBox 42"/>
+          <p:cNvPr id="42" name="TextBox 41"/>
           <p:cNvSpPr txBox="1"/>
           <p:nvPr/>
         </p:nvSpPr>
@@ -6054,7 +5995,7 @@
       </p:sp>
       <p:sp>
         <p:nvSpPr>
-          <p:cNvPr id="44" name="TextBox 43"/>
+          <p:cNvPr id="43" name="TextBox 42"/>
           <p:cNvSpPr txBox="1"/>
           <p:nvPr/>
         </p:nvSpPr>
@@ -6093,7 +6034,7 @@
       </p:sp>
       <p:sp>
         <p:nvSpPr>
-          <p:cNvPr id="45" name="TextBox 44"/>
+          <p:cNvPr id="44" name="TextBox 43"/>
           <p:cNvSpPr txBox="1"/>
           <p:nvPr/>
         </p:nvSpPr>
@@ -6132,7 +6073,7 @@
       </p:sp>
       <p:sp>
         <p:nvSpPr>
-          <p:cNvPr id="46" name="TextBox 45"/>
+          <p:cNvPr id="45" name="TextBox 44"/>
           <p:cNvSpPr txBox="1"/>
           <p:nvPr/>
         </p:nvSpPr>
@@ -6171,7 +6112,7 @@
       </p:sp>
       <p:sp>
         <p:nvSpPr>
-          <p:cNvPr id="47" name="TextBox 46"/>
+          <p:cNvPr id="46" name="TextBox 45"/>
           <p:cNvSpPr txBox="1"/>
           <p:nvPr/>
         </p:nvSpPr>
@@ -6210,7 +6151,7 @@
       </p:sp>
       <p:sp>
         <p:nvSpPr>
-          <p:cNvPr id="48" name="Freeform 47"/>
+          <p:cNvPr id="47" name="Freeform 46"/>
           <p:cNvSpPr/>
           <p:nvPr/>
         </p:nvSpPr>
@@ -6281,7 +6222,7 @@
       </p:sp>
       <p:sp>
         <p:nvSpPr>
-          <p:cNvPr id="49" name="TextBox 48"/>
+          <p:cNvPr id="48" name="TextBox 47"/>
           <p:cNvSpPr txBox="1"/>
           <p:nvPr/>
         </p:nvSpPr>
@@ -6320,7 +6261,7 @@
       </p:sp>
       <p:sp>
         <p:nvSpPr>
-          <p:cNvPr id="50" name="Freeform 49"/>
+          <p:cNvPr id="49" name="Freeform 48"/>
           <p:cNvSpPr/>
           <p:nvPr/>
         </p:nvSpPr>
@@ -6391,7 +6332,7 @@
       </p:sp>
       <p:sp>
         <p:nvSpPr>
-          <p:cNvPr id="51" name="TextBox 50"/>
+          <p:cNvPr id="50" name="TextBox 49"/>
           <p:cNvSpPr txBox="1"/>
           <p:nvPr/>
         </p:nvSpPr>
@@ -6430,7 +6371,7 @@
       </p:sp>
       <p:sp>
         <p:nvSpPr>
-          <p:cNvPr id="52" name="Rectangle 51"/>
+          <p:cNvPr id="51" name="Rectangle 50"/>
           <p:cNvSpPr/>
           <p:nvPr/>
         </p:nvSpPr>
@@ -6474,7 +6415,7 @@
       </p:sp>
       <p:sp>
         <p:nvSpPr>
-          <p:cNvPr id="53" name="TextBox 52"/>
+          <p:cNvPr id="52" name="TextBox 51"/>
           <p:cNvSpPr txBox="1"/>
           <p:nvPr/>
         </p:nvSpPr>
@@ -6513,7 +6454,7 @@
       </p:sp>
       <p:sp>
         <p:nvSpPr>
-          <p:cNvPr id="54" name="TextBox 53"/>
+          <p:cNvPr id="53" name="TextBox 52"/>
           <p:cNvSpPr txBox="1"/>
           <p:nvPr/>
         </p:nvSpPr>
@@ -6681,12 +6622,20 @@
           </a:p>
         </p:txBody>
       </p:sp>
-      <p:sp>
-        <p:nvSpPr>
-          <p:cNvPr id="4" name="Rectangle 3"/>
-          <p:cNvSpPr/>
-          <p:nvPr/>
-        </p:nvSpPr>
+      <p:pic>
+        <p:nvPicPr>
+          <p:cNvPr id="4" name="Picture 3" descr="4058738025366184175.jpg"/>
+          <p:cNvPicPr>
+            <a:picLocks noChangeAspect="1"/>
+          </p:cNvPicPr>
+          <p:nvPr/>
+        </p:nvPicPr>
+        <p:blipFill>
+          <a:blip r:embed="rId3"/>
+          <a:stretch>
+            <a:fillRect/>
+          </a:stretch>
+        </p:blipFill>
         <p:spPr>
           <a:xfrm rot="180000">
             <a:off x="1695970" y="1290848"/>
@@ -6695,78 +6644,11 @@
           <a:prstGeom prst="rect">
             <a:avLst/>
           </a:prstGeom>
-          <a:solidFill>
-            <a:srgbClr val="C9C4B8"/>
-          </a:solidFill>
-          <a:ln>
-            <a:noFill/>
-          </a:ln>
-          <a:effectLst/>
-        </p:spPr>
-        <p:style>
-          <a:lnRef idx="1">
-            <a:schemeClr val="accent1"/>
-          </a:lnRef>
-          <a:fillRef idx="3">
-            <a:schemeClr val="accent1"/>
-          </a:fillRef>
-          <a:effectRef idx="2">
-            <a:schemeClr val="accent1"/>
-          </a:effectRef>
-          <a:fontRef idx="minor">
-            <a:schemeClr val="lt1"/>
-          </a:fontRef>
-        </p:style>
-        <p:txBody>
-          <a:bodyPr rtlCol="0" anchor="ctr"/>
-          <a:lstStyle/>
-          <a:p>
-            <a:pPr algn="ctr"/>
-          </a:p>
-        </p:txBody>
-      </p:sp>
-      <p:sp>
-        <p:nvSpPr>
-          <p:cNvPr id="5" name="TextBox 4"/>
-          <p:cNvSpPr txBox="1"/>
-          <p:nvPr/>
-        </p:nvSpPr>
-        <p:spPr>
-          <a:xfrm rot="180000">
-            <a:off x="1848370" y="1290848"/>
-            <a:ext cx="3314700" cy="3619500"/>
-          </a:xfrm>
-          <a:prstGeom prst="rect">
-            <a:avLst/>
-          </a:prstGeom>
-          <a:noFill/>
-        </p:spPr>
-        <p:txBody>
-          <a:bodyPr wrap="square" lIns="0" rIns="0" tIns="0" bIns="0" anchor="ctr">
-            <a:spAutoFit/>
-          </a:bodyPr>
-          <a:lstStyle/>
-          <a:p>
-            <a:pPr algn="ctr">
-              <a:lnSpc>
-                <a:spcPct val="120000"/>
-              </a:lnSpc>
-            </a:pPr>
-            <a:r>
-              <a:rPr sz="2000" b="1" i="0">
-                <a:solidFill>
-                  <a:srgbClr val="4A463F"/>
-                </a:solidFill>
-                <a:latin typeface="Source Sans 3"/>
-              </a:rPr>
-              <a:t>PHOTO: Nick Padwick, square headshot</a:t>
-            </a:r>
-          </a:p>
-        </p:txBody>
-      </p:sp>
-      <p:sp>
-        <p:nvSpPr>
-          <p:cNvPr id="6" name="Oval 5"/>
+        </p:spPr>
+      </p:pic>
+      <p:sp>
+        <p:nvSpPr>
+          <p:cNvPr id="5" name="Oval 4"/>
           <p:cNvSpPr/>
           <p:nvPr/>
         </p:nvSpPr>
@@ -6810,7 +6692,7 @@
       </p:sp>
       <p:sp>
         <p:nvSpPr>
-          <p:cNvPr id="7" name="Oval 6"/>
+          <p:cNvPr id="6" name="Oval 5"/>
           <p:cNvSpPr/>
           <p:nvPr/>
         </p:nvSpPr>
@@ -6854,7 +6736,7 @@
       </p:sp>
       <p:sp>
         <p:nvSpPr>
-          <p:cNvPr id="8" name="Oval 7"/>
+          <p:cNvPr id="7" name="Oval 6"/>
           <p:cNvSpPr/>
           <p:nvPr/>
         </p:nvSpPr>
@@ -6898,7 +6780,7 @@
       </p:sp>
       <p:sp>
         <p:nvSpPr>
-          <p:cNvPr id="9" name="Oval 8"/>
+          <p:cNvPr id="8" name="Oval 7"/>
           <p:cNvSpPr/>
           <p:nvPr/>
         </p:nvSpPr>
@@ -6942,7 +6824,7 @@
       </p:sp>
       <p:sp>
         <p:nvSpPr>
-          <p:cNvPr id="10" name="Oval 9"/>
+          <p:cNvPr id="9" name="Oval 8"/>
           <p:cNvSpPr/>
           <p:nvPr/>
         </p:nvSpPr>
@@ -6986,7 +6868,7 @@
       </p:sp>
       <p:sp>
         <p:nvSpPr>
-          <p:cNvPr id="11" name="Oval 10"/>
+          <p:cNvPr id="10" name="Oval 9"/>
           <p:cNvSpPr/>
           <p:nvPr/>
         </p:nvSpPr>
@@ -7030,7 +6912,7 @@
       </p:sp>
       <p:sp>
         <p:nvSpPr>
-          <p:cNvPr id="12" name="Oval 11"/>
+          <p:cNvPr id="11" name="Oval 10"/>
           <p:cNvSpPr/>
           <p:nvPr/>
         </p:nvSpPr>
@@ -7074,7 +6956,7 @@
       </p:sp>
       <p:sp>
         <p:nvSpPr>
-          <p:cNvPr id="13" name="Oval 12"/>
+          <p:cNvPr id="12" name="Oval 11"/>
           <p:cNvSpPr/>
           <p:nvPr/>
         </p:nvSpPr>
@@ -7118,7 +7000,7 @@
       </p:sp>
       <p:sp>
         <p:nvSpPr>
-          <p:cNvPr id="14" name="Oval 13"/>
+          <p:cNvPr id="13" name="Oval 12"/>
           <p:cNvSpPr/>
           <p:nvPr/>
         </p:nvSpPr>
@@ -7162,7 +7044,7 @@
       </p:sp>
       <p:sp>
         <p:nvSpPr>
-          <p:cNvPr id="15" name="Oval 14"/>
+          <p:cNvPr id="14" name="Oval 13"/>
           <p:cNvSpPr/>
           <p:nvPr/>
         </p:nvSpPr>
@@ -7206,7 +7088,7 @@
       </p:sp>
       <p:sp>
         <p:nvSpPr>
-          <p:cNvPr id="16" name="Oval 15"/>
+          <p:cNvPr id="15" name="Oval 14"/>
           <p:cNvSpPr/>
           <p:nvPr/>
         </p:nvSpPr>
@@ -7250,7 +7132,7 @@
       </p:sp>
       <p:sp>
         <p:nvSpPr>
-          <p:cNvPr id="17" name="Oval 16"/>
+          <p:cNvPr id="16" name="Oval 15"/>
           <p:cNvSpPr/>
           <p:nvPr/>
         </p:nvSpPr>
@@ -7294,7 +7176,7 @@
       </p:sp>
       <p:sp>
         <p:nvSpPr>
-          <p:cNvPr id="18" name="Oval 17"/>
+          <p:cNvPr id="17" name="Oval 16"/>
           <p:cNvSpPr/>
           <p:nvPr/>
         </p:nvSpPr>
@@ -7338,7 +7220,7 @@
       </p:sp>
       <p:sp>
         <p:nvSpPr>
-          <p:cNvPr id="19" name="Oval 18"/>
+          <p:cNvPr id="18" name="Oval 17"/>
           <p:cNvSpPr/>
           <p:nvPr/>
         </p:nvSpPr>
@@ -7382,7 +7264,7 @@
       </p:sp>
       <p:sp>
         <p:nvSpPr>
-          <p:cNvPr id="20" name="Oval 19"/>
+          <p:cNvPr id="19" name="Oval 18"/>
           <p:cNvSpPr/>
           <p:nvPr/>
         </p:nvSpPr>
@@ -7426,7 +7308,7 @@
       </p:sp>
       <p:sp>
         <p:nvSpPr>
-          <p:cNvPr id="21" name="Oval 20"/>
+          <p:cNvPr id="20" name="Oval 19"/>
           <p:cNvSpPr/>
           <p:nvPr/>
         </p:nvSpPr>
@@ -7470,7 +7352,7 @@
       </p:sp>
       <p:sp>
         <p:nvSpPr>
-          <p:cNvPr id="22" name="Oval 21"/>
+          <p:cNvPr id="21" name="Oval 20"/>
           <p:cNvSpPr/>
           <p:nvPr/>
         </p:nvSpPr>
@@ -7514,7 +7396,7 @@
       </p:sp>
       <p:sp>
         <p:nvSpPr>
-          <p:cNvPr id="23" name="Oval 22"/>
+          <p:cNvPr id="22" name="Oval 21"/>
           <p:cNvSpPr/>
           <p:nvPr/>
         </p:nvSpPr>
@@ -7558,7 +7440,7 @@
       </p:sp>
       <p:sp>
         <p:nvSpPr>
-          <p:cNvPr id="24" name="Oval 23"/>
+          <p:cNvPr id="23" name="Oval 22"/>
           <p:cNvSpPr/>
           <p:nvPr/>
         </p:nvSpPr>
@@ -7602,7 +7484,7 @@
       </p:sp>
       <p:sp>
         <p:nvSpPr>
-          <p:cNvPr id="25" name="Oval 24"/>
+          <p:cNvPr id="24" name="Oval 23"/>
           <p:cNvSpPr/>
           <p:nvPr/>
         </p:nvSpPr>
@@ -7646,7 +7528,7 @@
       </p:sp>
       <p:sp>
         <p:nvSpPr>
-          <p:cNvPr id="26" name="Oval 25"/>
+          <p:cNvPr id="25" name="Oval 24"/>
           <p:cNvSpPr/>
           <p:nvPr/>
         </p:nvSpPr>
@@ -7690,7 +7572,7 @@
       </p:sp>
       <p:sp>
         <p:nvSpPr>
-          <p:cNvPr id="27" name="Oval 26"/>
+          <p:cNvPr id="26" name="Oval 25"/>
           <p:cNvSpPr/>
           <p:nvPr/>
         </p:nvSpPr>
@@ -7734,7 +7616,7 @@
       </p:sp>
       <p:sp>
         <p:nvSpPr>
-          <p:cNvPr id="28" name="Oval 27"/>
+          <p:cNvPr id="27" name="Oval 26"/>
           <p:cNvSpPr/>
           <p:nvPr/>
         </p:nvSpPr>
@@ -7778,7 +7660,7 @@
       </p:sp>
       <p:sp>
         <p:nvSpPr>
-          <p:cNvPr id="29" name="Oval 28"/>
+          <p:cNvPr id="28" name="Oval 27"/>
           <p:cNvSpPr/>
           <p:nvPr/>
         </p:nvSpPr>
@@ -7822,7 +7704,7 @@
       </p:sp>
       <p:sp>
         <p:nvSpPr>
-          <p:cNvPr id="30" name="Oval 29"/>
+          <p:cNvPr id="29" name="Oval 28"/>
           <p:cNvSpPr/>
           <p:nvPr/>
         </p:nvSpPr>
@@ -7866,7 +7748,7 @@
       </p:sp>
       <p:sp>
         <p:nvSpPr>
-          <p:cNvPr id="31" name="Oval 30"/>
+          <p:cNvPr id="30" name="Oval 29"/>
           <p:cNvSpPr/>
           <p:nvPr/>
         </p:nvSpPr>
@@ -7910,7 +7792,7 @@
       </p:sp>
       <p:sp>
         <p:nvSpPr>
-          <p:cNvPr id="32" name="Oval 31"/>
+          <p:cNvPr id="31" name="Oval 30"/>
           <p:cNvSpPr/>
           <p:nvPr/>
         </p:nvSpPr>
@@ -7954,7 +7836,7 @@
       </p:sp>
       <p:sp>
         <p:nvSpPr>
-          <p:cNvPr id="33" name="Oval 32"/>
+          <p:cNvPr id="32" name="Oval 31"/>
           <p:cNvSpPr/>
           <p:nvPr/>
         </p:nvSpPr>
@@ -7998,7 +7880,7 @@
       </p:sp>
       <p:sp>
         <p:nvSpPr>
-          <p:cNvPr id="34" name="Oval 33"/>
+          <p:cNvPr id="33" name="Oval 32"/>
           <p:cNvSpPr/>
           <p:nvPr/>
         </p:nvSpPr>
@@ -8042,7 +7924,7 @@
       </p:sp>
       <p:sp>
         <p:nvSpPr>
-          <p:cNvPr id="35" name="Oval 34"/>
+          <p:cNvPr id="34" name="Oval 33"/>
           <p:cNvSpPr/>
           <p:nvPr/>
         </p:nvSpPr>
@@ -8086,7 +7968,7 @@
       </p:sp>
       <p:sp>
         <p:nvSpPr>
-          <p:cNvPr id="36" name="Oval 35"/>
+          <p:cNvPr id="35" name="Oval 34"/>
           <p:cNvSpPr/>
           <p:nvPr/>
         </p:nvSpPr>
@@ -8130,7 +8012,7 @@
       </p:sp>
       <p:sp>
         <p:nvSpPr>
-          <p:cNvPr id="37" name="Oval 36"/>
+          <p:cNvPr id="36" name="Oval 35"/>
           <p:cNvSpPr/>
           <p:nvPr/>
         </p:nvSpPr>
@@ -8174,7 +8056,7 @@
       </p:sp>
       <p:sp>
         <p:nvSpPr>
-          <p:cNvPr id="38" name="Oval 37"/>
+          <p:cNvPr id="37" name="Oval 36"/>
           <p:cNvSpPr/>
           <p:nvPr/>
         </p:nvSpPr>
@@ -8218,7 +8100,7 @@
       </p:sp>
       <p:sp>
         <p:nvSpPr>
-          <p:cNvPr id="39" name="TextBox 38"/>
+          <p:cNvPr id="38" name="TextBox 37"/>
           <p:cNvSpPr txBox="1"/>
           <p:nvPr/>
         </p:nvSpPr>
@@ -8257,7 +8139,7 @@
       </p:sp>
       <p:sp>
         <p:nvSpPr>
-          <p:cNvPr id="40" name="TextBox 39"/>
+          <p:cNvPr id="39" name="TextBox 38"/>
           <p:cNvSpPr txBox="1"/>
           <p:nvPr/>
         </p:nvSpPr>
@@ -8296,7 +8178,7 @@
       </p:sp>
       <p:sp>
         <p:nvSpPr>
-          <p:cNvPr id="41" name="TextBox 40"/>
+          <p:cNvPr id="40" name="TextBox 39"/>
           <p:cNvSpPr txBox="1"/>
           <p:nvPr/>
         </p:nvSpPr>
@@ -8335,7 +8217,7 @@
       </p:sp>
       <p:sp>
         <p:nvSpPr>
-          <p:cNvPr id="42" name="TextBox 41"/>
+          <p:cNvPr id="41" name="TextBox 40"/>
           <p:cNvSpPr txBox="1"/>
           <p:nvPr/>
         </p:nvSpPr>
@@ -8374,7 +8256,7 @@
       </p:sp>
       <p:sp>
         <p:nvSpPr>
-          <p:cNvPr id="43" name="TextBox 42"/>
+          <p:cNvPr id="42" name="TextBox 41"/>
           <p:cNvSpPr txBox="1"/>
           <p:nvPr/>
         </p:nvSpPr>
@@ -8413,7 +8295,7 @@
       </p:sp>
       <p:sp>
         <p:nvSpPr>
-          <p:cNvPr id="44" name="TextBox 43"/>
+          <p:cNvPr id="43" name="TextBox 42"/>
           <p:cNvSpPr txBox="1"/>
           <p:nvPr/>
         </p:nvSpPr>
@@ -8452,7 +8334,7 @@
       </p:sp>
       <p:sp>
         <p:nvSpPr>
-          <p:cNvPr id="45" name="TextBox 44"/>
+          <p:cNvPr id="44" name="TextBox 43"/>
           <p:cNvSpPr txBox="1"/>
           <p:nvPr/>
         </p:nvSpPr>
@@ -8491,7 +8373,7 @@
       </p:sp>
       <p:sp>
         <p:nvSpPr>
-          <p:cNvPr id="46" name="TextBox 45"/>
+          <p:cNvPr id="45" name="TextBox 44"/>
           <p:cNvSpPr txBox="1"/>
           <p:nvPr/>
         </p:nvSpPr>
@@ -8530,7 +8412,7 @@
       </p:sp>
       <p:sp>
         <p:nvSpPr>
-          <p:cNvPr id="47" name="TextBox 46"/>
+          <p:cNvPr id="46" name="TextBox 45"/>
           <p:cNvSpPr txBox="1"/>
           <p:nvPr/>
         </p:nvSpPr>
@@ -8569,7 +8451,7 @@
       </p:sp>
       <p:sp>
         <p:nvSpPr>
-          <p:cNvPr id="48" name="Freeform 47"/>
+          <p:cNvPr id="47" name="Freeform 46"/>
           <p:cNvSpPr/>
           <p:nvPr/>
         </p:nvSpPr>
@@ -8640,7 +8522,7 @@
       </p:sp>
       <p:sp>
         <p:nvSpPr>
-          <p:cNvPr id="49" name="TextBox 48"/>
+          <p:cNvPr id="48" name="TextBox 47"/>
           <p:cNvSpPr txBox="1"/>
           <p:nvPr/>
         </p:nvSpPr>
@@ -8679,7 +8561,7 @@
       </p:sp>
       <p:sp>
         <p:nvSpPr>
-          <p:cNvPr id="50" name="Freeform 49"/>
+          <p:cNvPr id="49" name="Freeform 48"/>
           <p:cNvSpPr/>
           <p:nvPr/>
         </p:nvSpPr>
@@ -8750,7 +8632,7 @@
       </p:sp>
       <p:sp>
         <p:nvSpPr>
-          <p:cNvPr id="51" name="TextBox 50"/>
+          <p:cNvPr id="50" name="TextBox 49"/>
           <p:cNvSpPr txBox="1"/>
           <p:nvPr/>
         </p:nvSpPr>
@@ -8789,7 +8671,7 @@
       </p:sp>
       <p:sp>
         <p:nvSpPr>
-          <p:cNvPr id="52" name="Rectangle 51"/>
+          <p:cNvPr id="51" name="Rectangle 50"/>
           <p:cNvSpPr/>
           <p:nvPr/>
         </p:nvSpPr>
@@ -8833,7 +8715,7 @@
       </p:sp>
       <p:sp>
         <p:nvSpPr>
-          <p:cNvPr id="53" name="TextBox 52"/>
+          <p:cNvPr id="52" name="TextBox 51"/>
           <p:cNvSpPr txBox="1"/>
           <p:nvPr/>
         </p:nvSpPr>
@@ -8872,7 +8754,7 @@
       </p:sp>
       <p:sp>
         <p:nvSpPr>
-          <p:cNvPr id="54" name="TextBox 53"/>
+          <p:cNvPr id="53" name="TextBox 52"/>
           <p:cNvSpPr txBox="1"/>
           <p:nvPr/>
         </p:nvSpPr>
@@ -9040,12 +8922,20 @@
           </a:p>
         </p:txBody>
       </p:sp>
-      <p:sp>
-        <p:nvSpPr>
-          <p:cNvPr id="4" name="Rectangle 3"/>
-          <p:cNvSpPr/>
-          <p:nvPr/>
-        </p:nvSpPr>
+      <p:pic>
+        <p:nvPicPr>
+          <p:cNvPr id="4" name="Picture 3" descr="3463987928563633322.jpg"/>
+          <p:cNvPicPr>
+            <a:picLocks noChangeAspect="1"/>
+          </p:cNvPicPr>
+          <p:nvPr/>
+        </p:nvPicPr>
+        <p:blipFill>
+          <a:blip r:embed="rId3"/>
+          <a:stretch>
+            <a:fillRect/>
+          </a:stretch>
+        </p:blipFill>
         <p:spPr>
           <a:xfrm rot="180000">
             <a:off x="1695970" y="1290848"/>
@@ -9054,78 +8944,11 @@
           <a:prstGeom prst="rect">
             <a:avLst/>
           </a:prstGeom>
-          <a:solidFill>
-            <a:srgbClr val="C9C4B8"/>
-          </a:solidFill>
-          <a:ln>
-            <a:noFill/>
-          </a:ln>
-          <a:effectLst/>
-        </p:spPr>
-        <p:style>
-          <a:lnRef idx="1">
-            <a:schemeClr val="accent1"/>
-          </a:lnRef>
-          <a:fillRef idx="3">
-            <a:schemeClr val="accent1"/>
-          </a:fillRef>
-          <a:effectRef idx="2">
-            <a:schemeClr val="accent1"/>
-          </a:effectRef>
-          <a:fontRef idx="minor">
-            <a:schemeClr val="lt1"/>
-          </a:fontRef>
-        </p:style>
-        <p:txBody>
-          <a:bodyPr rtlCol="0" anchor="ctr"/>
-          <a:lstStyle/>
-          <a:p>
-            <a:pPr algn="ctr"/>
-          </a:p>
-        </p:txBody>
-      </p:sp>
-      <p:sp>
-        <p:nvSpPr>
-          <p:cNvPr id="5" name="TextBox 4"/>
-          <p:cNvSpPr txBox="1"/>
-          <p:nvPr/>
-        </p:nvSpPr>
-        <p:spPr>
-          <a:xfrm rot="180000">
-            <a:off x="1848370" y="1290848"/>
-            <a:ext cx="3314700" cy="3619500"/>
-          </a:xfrm>
-          <a:prstGeom prst="rect">
-            <a:avLst/>
-          </a:prstGeom>
-          <a:noFill/>
-        </p:spPr>
-        <p:txBody>
-          <a:bodyPr wrap="square" lIns="0" rIns="0" tIns="0" bIns="0" anchor="ctr">
-            <a:spAutoFit/>
-          </a:bodyPr>
-          <a:lstStyle/>
-          <a:p>
-            <a:pPr algn="ctr">
-              <a:lnSpc>
-                <a:spcPct val="120000"/>
-              </a:lnSpc>
-            </a:pPr>
-            <a:r>
-              <a:rPr sz="2000" b="1" i="0">
-                <a:solidFill>
-                  <a:srgbClr val="4A463F"/>
-                </a:solidFill>
-                <a:latin typeface="Source Sans 3"/>
-              </a:rPr>
-              <a:t>PHOTO: Wes Sander, square headshot</a:t>
-            </a:r>
-          </a:p>
-        </p:txBody>
-      </p:sp>
-      <p:sp>
-        <p:nvSpPr>
-          <p:cNvPr id="6" name="Oval 5"/>
+        </p:spPr>
+      </p:pic>
+      <p:sp>
+        <p:nvSpPr>
+          <p:cNvPr id="5" name="Oval 4"/>
           <p:cNvSpPr/>
           <p:nvPr/>
         </p:nvSpPr>
@@ -9169,7 +8992,7 @@
       </p:sp>
       <p:sp>
         <p:nvSpPr>
-          <p:cNvPr id="7" name="Oval 6"/>
+          <p:cNvPr id="6" name="Oval 5"/>
           <p:cNvSpPr/>
           <p:nvPr/>
         </p:nvSpPr>
@@ -9213,7 +9036,7 @@
       </p:sp>
       <p:sp>
         <p:nvSpPr>
-          <p:cNvPr id="8" name="Oval 7"/>
+          <p:cNvPr id="7" name="Oval 6"/>
           <p:cNvSpPr/>
           <p:nvPr/>
         </p:nvSpPr>
@@ -9257,7 +9080,7 @@
       </p:sp>
       <p:sp>
         <p:nvSpPr>
-          <p:cNvPr id="9" name="Oval 8"/>
+          <p:cNvPr id="8" name="Oval 7"/>
           <p:cNvSpPr/>
           <p:nvPr/>
         </p:nvSpPr>
@@ -9301,7 +9124,7 @@
       </p:sp>
       <p:sp>
         <p:nvSpPr>
-          <p:cNvPr id="10" name="Oval 9"/>
+          <p:cNvPr id="9" name="Oval 8"/>
           <p:cNvSpPr/>
           <p:nvPr/>
         </p:nvSpPr>
@@ -9345,7 +9168,7 @@
       </p:sp>
       <p:sp>
         <p:nvSpPr>
-          <p:cNvPr id="11" name="Oval 10"/>
+          <p:cNvPr id="10" name="Oval 9"/>
           <p:cNvSpPr/>
           <p:nvPr/>
         </p:nvSpPr>
@@ -9389,7 +9212,7 @@
       </p:sp>
       <p:sp>
         <p:nvSpPr>
-          <p:cNvPr id="12" name="Oval 11"/>
+          <p:cNvPr id="11" name="Oval 10"/>
           <p:cNvSpPr/>
           <p:nvPr/>
         </p:nvSpPr>
@@ -9433,7 +9256,7 @@
       </p:sp>
       <p:sp>
         <p:nvSpPr>
-          <p:cNvPr id="13" name="Oval 12"/>
+          <p:cNvPr id="12" name="Oval 11"/>
           <p:cNvSpPr/>
           <p:nvPr/>
         </p:nvSpPr>
@@ -9477,7 +9300,7 @@
       </p:sp>
       <p:sp>
         <p:nvSpPr>
-          <p:cNvPr id="14" name="Oval 13"/>
+          <p:cNvPr id="13" name="Oval 12"/>
           <p:cNvSpPr/>
           <p:nvPr/>
         </p:nvSpPr>
@@ -9521,7 +9344,7 @@
       </p:sp>
       <p:sp>
         <p:nvSpPr>
-          <p:cNvPr id="15" name="Oval 14"/>
+          <p:cNvPr id="14" name="Oval 13"/>
           <p:cNvSpPr/>
           <p:nvPr/>
         </p:nvSpPr>
@@ -9565,7 +9388,7 @@
       </p:sp>
       <p:sp>
         <p:nvSpPr>
-          <p:cNvPr id="16" name="Oval 15"/>
+          <p:cNvPr id="15" name="Oval 14"/>
           <p:cNvSpPr/>
           <p:nvPr/>
         </p:nvSpPr>
@@ -9609,7 +9432,7 @@
       </p:sp>
       <p:sp>
         <p:nvSpPr>
-          <p:cNvPr id="17" name="Oval 16"/>
+          <p:cNvPr id="16" name="Oval 15"/>
           <p:cNvSpPr/>
           <p:nvPr/>
         </p:nvSpPr>
@@ -9653,7 +9476,7 @@
       </p:sp>
       <p:sp>
         <p:nvSpPr>
-          <p:cNvPr id="18" name="Oval 17"/>
+          <p:cNvPr id="17" name="Oval 16"/>
           <p:cNvSpPr/>
           <p:nvPr/>
         </p:nvSpPr>
@@ -9697,7 +9520,7 @@
       </p:sp>
       <p:sp>
         <p:nvSpPr>
-          <p:cNvPr id="19" name="Oval 18"/>
+          <p:cNvPr id="18" name="Oval 17"/>
           <p:cNvSpPr/>
           <p:nvPr/>
         </p:nvSpPr>
@@ -9741,7 +9564,7 @@
       </p:sp>
       <p:sp>
         <p:nvSpPr>
-          <p:cNvPr id="20" name="Oval 19"/>
+          <p:cNvPr id="19" name="Oval 18"/>
           <p:cNvSpPr/>
           <p:nvPr/>
         </p:nvSpPr>
@@ -9785,7 +9608,7 @@
       </p:sp>
       <p:sp>
         <p:nvSpPr>
-          <p:cNvPr id="21" name="Oval 20"/>
+          <p:cNvPr id="20" name="Oval 19"/>
           <p:cNvSpPr/>
           <p:nvPr/>
         </p:nvSpPr>
@@ -9829,7 +9652,7 @@
       </p:sp>
       <p:sp>
         <p:nvSpPr>
-          <p:cNvPr id="22" name="Oval 21"/>
+          <p:cNvPr id="21" name="Oval 20"/>
           <p:cNvSpPr/>
           <p:nvPr/>
         </p:nvSpPr>
@@ -9873,7 +9696,7 @@
       </p:sp>
       <p:sp>
         <p:nvSpPr>
-          <p:cNvPr id="23" name="Oval 22"/>
+          <p:cNvPr id="22" name="Oval 21"/>
           <p:cNvSpPr/>
           <p:nvPr/>
         </p:nvSpPr>
@@ -9917,7 +9740,7 @@
       </p:sp>
       <p:sp>
         <p:nvSpPr>
-          <p:cNvPr id="24" name="Oval 23"/>
+          <p:cNvPr id="23" name="Oval 22"/>
           <p:cNvSpPr/>
           <p:nvPr/>
         </p:nvSpPr>
@@ -9961,7 +9784,7 @@
       </p:sp>
       <p:sp>
         <p:nvSpPr>
-          <p:cNvPr id="25" name="Oval 24"/>
+          <p:cNvPr id="24" name="Oval 23"/>
           <p:cNvSpPr/>
           <p:nvPr/>
         </p:nvSpPr>
@@ -10005,7 +9828,7 @@
       </p:sp>
       <p:sp>
         <p:nvSpPr>
-          <p:cNvPr id="26" name="Oval 25"/>
+          <p:cNvPr id="25" name="Oval 24"/>
           <p:cNvSpPr/>
           <p:nvPr/>
         </p:nvSpPr>
@@ -10049,7 +9872,7 @@
       </p:sp>
       <p:sp>
         <p:nvSpPr>
-          <p:cNvPr id="27" name="Oval 26"/>
+          <p:cNvPr id="26" name="Oval 25"/>
           <p:cNvSpPr/>
           <p:nvPr/>
         </p:nvSpPr>
@@ -10093,7 +9916,7 @@
       </p:sp>
       <p:sp>
         <p:nvSpPr>
-          <p:cNvPr id="28" name="Oval 27"/>
+          <p:cNvPr id="27" name="Oval 26"/>
           <p:cNvSpPr/>
           <p:nvPr/>
         </p:nvSpPr>
@@ -10137,7 +9960,7 @@
       </p:sp>
       <p:sp>
         <p:nvSpPr>
-          <p:cNvPr id="29" name="Oval 28"/>
+          <p:cNvPr id="28" name="Oval 27"/>
           <p:cNvSpPr/>
           <p:nvPr/>
         </p:nvSpPr>
@@ -10181,7 +10004,7 @@
       </p:sp>
       <p:sp>
         <p:nvSpPr>
-          <p:cNvPr id="30" name="Oval 29"/>
+          <p:cNvPr id="29" name="Oval 28"/>
           <p:cNvSpPr/>
           <p:nvPr/>
         </p:nvSpPr>
@@ -10225,7 +10048,7 @@
       </p:sp>
       <p:sp>
         <p:nvSpPr>
-          <p:cNvPr id="31" name="Oval 30"/>
+          <p:cNvPr id="30" name="Oval 29"/>
           <p:cNvSpPr/>
           <p:nvPr/>
         </p:nvSpPr>
@@ -10269,7 +10092,7 @@
       </p:sp>
       <p:sp>
         <p:nvSpPr>
-          <p:cNvPr id="32" name="Oval 31"/>
+          <p:cNvPr id="31" name="Oval 30"/>
           <p:cNvSpPr/>
           <p:nvPr/>
         </p:nvSpPr>
@@ -10313,7 +10136,7 @@
       </p:sp>
       <p:sp>
         <p:nvSpPr>
-          <p:cNvPr id="33" name="Oval 32"/>
+          <p:cNvPr id="32" name="Oval 31"/>
           <p:cNvSpPr/>
           <p:nvPr/>
         </p:nvSpPr>
@@ -10357,7 +10180,7 @@
       </p:sp>
       <p:sp>
         <p:nvSpPr>
-          <p:cNvPr id="34" name="Oval 33"/>
+          <p:cNvPr id="33" name="Oval 32"/>
           <p:cNvSpPr/>
           <p:nvPr/>
         </p:nvSpPr>
@@ -10401,7 +10224,7 @@
       </p:sp>
       <p:sp>
         <p:nvSpPr>
-          <p:cNvPr id="35" name="Oval 34"/>
+          <p:cNvPr id="34" name="Oval 33"/>
           <p:cNvSpPr/>
           <p:nvPr/>
         </p:nvSpPr>
@@ -10445,7 +10268,7 @@
       </p:sp>
       <p:sp>
         <p:nvSpPr>
-          <p:cNvPr id="36" name="Oval 35"/>
+          <p:cNvPr id="35" name="Oval 34"/>
           <p:cNvSpPr/>
           <p:nvPr/>
         </p:nvSpPr>
@@ -10489,7 +10312,7 @@
       </p:sp>
       <p:sp>
         <p:nvSpPr>
-          <p:cNvPr id="37" name="Oval 36"/>
+          <p:cNvPr id="36" name="Oval 35"/>
           <p:cNvSpPr/>
           <p:nvPr/>
         </p:nvSpPr>
@@ -10533,7 +10356,7 @@
       </p:sp>
       <p:sp>
         <p:nvSpPr>
-          <p:cNvPr id="38" name="Oval 37"/>
+          <p:cNvPr id="37" name="Oval 36"/>
           <p:cNvSpPr/>
           <p:nvPr/>
         </p:nvSpPr>
@@ -10577,7 +10400,7 @@
       </p:sp>
       <p:sp>
         <p:nvSpPr>
-          <p:cNvPr id="39" name="TextBox 38"/>
+          <p:cNvPr id="38" name="TextBox 37"/>
           <p:cNvSpPr txBox="1"/>
           <p:nvPr/>
         </p:nvSpPr>
@@ -10616,7 +10439,7 @@
       </p:sp>
       <p:sp>
         <p:nvSpPr>
-          <p:cNvPr id="40" name="TextBox 39"/>
+          <p:cNvPr id="39" name="TextBox 38"/>
           <p:cNvSpPr txBox="1"/>
           <p:nvPr/>
         </p:nvSpPr>
@@ -10655,7 +10478,7 @@
       </p:sp>
       <p:sp>
         <p:nvSpPr>
-          <p:cNvPr id="41" name="TextBox 40"/>
+          <p:cNvPr id="40" name="TextBox 39"/>
           <p:cNvSpPr txBox="1"/>
           <p:nvPr/>
         </p:nvSpPr>
@@ -10694,7 +10517,7 @@
       </p:sp>
       <p:sp>
         <p:nvSpPr>
-          <p:cNvPr id="42" name="TextBox 41"/>
+          <p:cNvPr id="41" name="TextBox 40"/>
           <p:cNvSpPr txBox="1"/>
           <p:nvPr/>
         </p:nvSpPr>
@@ -10733,7 +10556,7 @@
       </p:sp>
       <p:sp>
         <p:nvSpPr>
-          <p:cNvPr id="43" name="TextBox 42"/>
+          <p:cNvPr id="42" name="TextBox 41"/>
           <p:cNvSpPr txBox="1"/>
           <p:nvPr/>
         </p:nvSpPr>
@@ -10772,7 +10595,7 @@
       </p:sp>
       <p:sp>
         <p:nvSpPr>
-          <p:cNvPr id="44" name="TextBox 43"/>
+          <p:cNvPr id="43" name="TextBox 42"/>
           <p:cNvSpPr txBox="1"/>
           <p:nvPr/>
         </p:nvSpPr>
@@ -10811,7 +10634,7 @@
       </p:sp>
       <p:sp>
         <p:nvSpPr>
-          <p:cNvPr id="45" name="TextBox 44"/>
+          <p:cNvPr id="44" name="TextBox 43"/>
           <p:cNvSpPr txBox="1"/>
           <p:nvPr/>
         </p:nvSpPr>
@@ -10850,7 +10673,7 @@
       </p:sp>
       <p:sp>
         <p:nvSpPr>
-          <p:cNvPr id="46" name="TextBox 45"/>
+          <p:cNvPr id="45" name="TextBox 44"/>
           <p:cNvSpPr txBox="1"/>
           <p:nvPr/>
         </p:nvSpPr>
@@ -10889,7 +10712,7 @@
       </p:sp>
       <p:sp>
         <p:nvSpPr>
-          <p:cNvPr id="47" name="TextBox 46"/>
+          <p:cNvPr id="46" name="TextBox 45"/>
           <p:cNvSpPr txBox="1"/>
           <p:nvPr/>
         </p:nvSpPr>
@@ -10928,7 +10751,7 @@
       </p:sp>
       <p:sp>
         <p:nvSpPr>
-          <p:cNvPr id="48" name="Freeform 47"/>
+          <p:cNvPr id="47" name="Freeform 46"/>
           <p:cNvSpPr/>
           <p:nvPr/>
         </p:nvSpPr>
@@ -10999,7 +10822,7 @@
       </p:sp>
       <p:sp>
         <p:nvSpPr>
-          <p:cNvPr id="49" name="TextBox 48"/>
+          <p:cNvPr id="48" name="TextBox 47"/>
           <p:cNvSpPr txBox="1"/>
           <p:nvPr/>
         </p:nvSpPr>
@@ -11038,7 +10861,7 @@
       </p:sp>
       <p:sp>
         <p:nvSpPr>
-          <p:cNvPr id="50" name="Freeform 49"/>
+          <p:cNvPr id="49" name="Freeform 48"/>
           <p:cNvSpPr/>
           <p:nvPr/>
         </p:nvSpPr>
@@ -11109,7 +10932,7 @@
       </p:sp>
       <p:sp>
         <p:nvSpPr>
-          <p:cNvPr id="51" name="TextBox 50"/>
+          <p:cNvPr id="50" name="TextBox 49"/>
           <p:cNvSpPr txBox="1"/>
           <p:nvPr/>
         </p:nvSpPr>
@@ -11148,7 +10971,7 @@
       </p:sp>
       <p:sp>
         <p:nvSpPr>
-          <p:cNvPr id="52" name="Rectangle 51"/>
+          <p:cNvPr id="51" name="Rectangle 50"/>
           <p:cNvSpPr/>
           <p:nvPr/>
         </p:nvSpPr>
@@ -11192,7 +11015,7 @@
       </p:sp>
       <p:sp>
         <p:nvSpPr>
-          <p:cNvPr id="53" name="TextBox 52"/>
+          <p:cNvPr id="52" name="TextBox 51"/>
           <p:cNvSpPr txBox="1"/>
           <p:nvPr/>
         </p:nvSpPr>
@@ -11231,7 +11054,7 @@
       </p:sp>
       <p:sp>
         <p:nvSpPr>
-          <p:cNvPr id="54" name="TextBox 53"/>
+          <p:cNvPr id="53" name="TextBox 52"/>
           <p:cNvSpPr txBox="1"/>
           <p:nvPr/>
         </p:nvSpPr>
@@ -11399,12 +11222,20 @@
           </a:p>
         </p:txBody>
       </p:sp>
-      <p:sp>
-        <p:nvSpPr>
-          <p:cNvPr id="4" name="Rectangle 3"/>
-          <p:cNvSpPr/>
-          <p:nvPr/>
-        </p:nvSpPr>
+      <p:pic>
+        <p:nvPicPr>
+          <p:cNvPr id="4" name="Picture 3" descr="7897438512424806890.jpg"/>
+          <p:cNvPicPr>
+            <a:picLocks noChangeAspect="1"/>
+          </p:cNvPicPr>
+          <p:nvPr/>
+        </p:nvPicPr>
+        <p:blipFill>
+          <a:blip r:embed="rId3"/>
+          <a:stretch>
+            <a:fillRect/>
+          </a:stretch>
+        </p:blipFill>
         <p:spPr>
           <a:xfrm rot="180000">
             <a:off x="1695970" y="1290848"/>
@@ -11413,78 +11244,11 @@
           <a:prstGeom prst="rect">
             <a:avLst/>
           </a:prstGeom>
-          <a:solidFill>
-            <a:srgbClr val="C9C4B8"/>
-          </a:solidFill>
-          <a:ln>
-            <a:noFill/>
-          </a:ln>
-          <a:effectLst/>
-        </p:spPr>
-        <p:style>
-          <a:lnRef idx="1">
-            <a:schemeClr val="accent1"/>
-          </a:lnRef>
-          <a:fillRef idx="3">
-            <a:schemeClr val="accent1"/>
-          </a:fillRef>
-          <a:effectRef idx="2">
-            <a:schemeClr val="accent1"/>
-          </a:effectRef>
-          <a:fontRef idx="minor">
-            <a:schemeClr val="lt1"/>
-          </a:fontRef>
-        </p:style>
-        <p:txBody>
-          <a:bodyPr rtlCol="0" anchor="ctr"/>
-          <a:lstStyle/>
-          <a:p>
-            <a:pPr algn="ctr"/>
-          </a:p>
-        </p:txBody>
-      </p:sp>
-      <p:sp>
-        <p:nvSpPr>
-          <p:cNvPr id="5" name="TextBox 4"/>
-          <p:cNvSpPr txBox="1"/>
-          <p:nvPr/>
-        </p:nvSpPr>
-        <p:spPr>
-          <a:xfrm rot="180000">
-            <a:off x="1848370" y="1290848"/>
-            <a:ext cx="3314700" cy="3619500"/>
-          </a:xfrm>
-          <a:prstGeom prst="rect">
-            <a:avLst/>
-          </a:prstGeom>
-          <a:noFill/>
-        </p:spPr>
-        <p:txBody>
-          <a:bodyPr wrap="square" lIns="0" rIns="0" tIns="0" bIns="0" anchor="ctr">
-            <a:spAutoFit/>
-          </a:bodyPr>
-          <a:lstStyle/>
-          <a:p>
-            <a:pPr algn="ctr">
-              <a:lnSpc>
-                <a:spcPct val="120000"/>
-              </a:lnSpc>
-            </a:pPr>
-            <a:r>
-              <a:rPr sz="2000" b="1" i="0">
-                <a:solidFill>
-                  <a:srgbClr val="4A463F"/>
-                </a:solidFill>
-                <a:latin typeface="Source Sans 3"/>
-              </a:rPr>
-              <a:t>PHOTO: Gerald Ramirez, square headshot</a:t>
-            </a:r>
-          </a:p>
-        </p:txBody>
-      </p:sp>
-      <p:sp>
-        <p:nvSpPr>
-          <p:cNvPr id="6" name="Oval 5"/>
+        </p:spPr>
+      </p:pic>
+      <p:sp>
+        <p:nvSpPr>
+          <p:cNvPr id="5" name="Oval 4"/>
           <p:cNvSpPr/>
           <p:nvPr/>
         </p:nvSpPr>
@@ -11528,7 +11292,7 @@
       </p:sp>
       <p:sp>
         <p:nvSpPr>
-          <p:cNvPr id="7" name="Oval 6"/>
+          <p:cNvPr id="6" name="Oval 5"/>
           <p:cNvSpPr/>
           <p:nvPr/>
         </p:nvSpPr>
@@ -11572,7 +11336,7 @@
       </p:sp>
       <p:sp>
         <p:nvSpPr>
-          <p:cNvPr id="8" name="Oval 7"/>
+          <p:cNvPr id="7" name="Oval 6"/>
           <p:cNvSpPr/>
           <p:nvPr/>
         </p:nvSpPr>
@@ -11616,7 +11380,7 @@
       </p:sp>
       <p:sp>
         <p:nvSpPr>
-          <p:cNvPr id="9" name="Oval 8"/>
+          <p:cNvPr id="8" name="Oval 7"/>
           <p:cNvSpPr/>
           <p:nvPr/>
         </p:nvSpPr>
@@ -11660,7 +11424,7 @@
       </p:sp>
       <p:sp>
         <p:nvSpPr>
-          <p:cNvPr id="10" name="Oval 9"/>
+          <p:cNvPr id="9" name="Oval 8"/>
           <p:cNvSpPr/>
           <p:nvPr/>
         </p:nvSpPr>
@@ -11704,7 +11468,7 @@
       </p:sp>
       <p:sp>
         <p:nvSpPr>
-          <p:cNvPr id="11" name="Oval 10"/>
+          <p:cNvPr id="10" name="Oval 9"/>
           <p:cNvSpPr/>
           <p:nvPr/>
         </p:nvSpPr>
@@ -11748,7 +11512,7 @@
       </p:sp>
       <p:sp>
         <p:nvSpPr>
-          <p:cNvPr id="12" name="Oval 11"/>
+          <p:cNvPr id="11" name="Oval 10"/>
           <p:cNvSpPr/>
           <p:nvPr/>
         </p:nvSpPr>
@@ -11792,7 +11556,7 @@
       </p:sp>
       <p:sp>
         <p:nvSpPr>
-          <p:cNvPr id="13" name="Oval 12"/>
+          <p:cNvPr id="12" name="Oval 11"/>
           <p:cNvSpPr/>
           <p:nvPr/>
         </p:nvSpPr>
@@ -11836,7 +11600,7 @@
       </p:sp>
       <p:sp>
         <p:nvSpPr>
-          <p:cNvPr id="14" name="Oval 13"/>
+          <p:cNvPr id="13" name="Oval 12"/>
           <p:cNvSpPr/>
           <p:nvPr/>
         </p:nvSpPr>
@@ -11880,7 +11644,7 @@
       </p:sp>
       <p:sp>
         <p:nvSpPr>
-          <p:cNvPr id="15" name="Oval 14"/>
+          <p:cNvPr id="14" name="Oval 13"/>
           <p:cNvSpPr/>
           <p:nvPr/>
         </p:nvSpPr>
@@ -11924,7 +11688,7 @@
       </p:sp>
       <p:sp>
         <p:nvSpPr>
-          <p:cNvPr id="16" name="Oval 15"/>
+          <p:cNvPr id="15" name="Oval 14"/>
           <p:cNvSpPr/>
           <p:nvPr/>
         </p:nvSpPr>
@@ -11968,7 +11732,7 @@
       </p:sp>
       <p:sp>
         <p:nvSpPr>
-          <p:cNvPr id="17" name="Oval 16"/>
+          <p:cNvPr id="16" name="Oval 15"/>
           <p:cNvSpPr/>
           <p:nvPr/>
         </p:nvSpPr>
@@ -12012,7 +11776,7 @@
       </p:sp>
       <p:sp>
         <p:nvSpPr>
-          <p:cNvPr id="18" name="Oval 17"/>
+          <p:cNvPr id="17" name="Oval 16"/>
           <p:cNvSpPr/>
           <p:nvPr/>
         </p:nvSpPr>
@@ -12056,7 +11820,7 @@
       </p:sp>
       <p:sp>
         <p:nvSpPr>
-          <p:cNvPr id="19" name="Oval 18"/>
+          <p:cNvPr id="18" name="Oval 17"/>
           <p:cNvSpPr/>
           <p:nvPr/>
         </p:nvSpPr>
@@ -12100,7 +11864,7 @@
       </p:sp>
       <p:sp>
         <p:nvSpPr>
-          <p:cNvPr id="20" name="Oval 19"/>
+          <p:cNvPr id="19" name="Oval 18"/>
           <p:cNvSpPr/>
           <p:nvPr/>
         </p:nvSpPr>
@@ -12144,7 +11908,7 @@
       </p:sp>
       <p:sp>
         <p:nvSpPr>
-          <p:cNvPr id="21" name="Oval 20"/>
+          <p:cNvPr id="20" name="Oval 19"/>
           <p:cNvSpPr/>
           <p:nvPr/>
         </p:nvSpPr>
@@ -12188,7 +11952,7 @@
       </p:sp>
       <p:sp>
         <p:nvSpPr>
-          <p:cNvPr id="22" name="Oval 21"/>
+          <p:cNvPr id="21" name="Oval 20"/>
           <p:cNvSpPr/>
           <p:nvPr/>
         </p:nvSpPr>
@@ -12232,7 +11996,7 @@
       </p:sp>
       <p:sp>
         <p:nvSpPr>
-          <p:cNvPr id="23" name="Oval 22"/>
+          <p:cNvPr id="22" name="Oval 21"/>
           <p:cNvSpPr/>
           <p:nvPr/>
         </p:nvSpPr>
@@ -12276,7 +12040,7 @@
       </p:sp>
       <p:sp>
         <p:nvSpPr>
-          <p:cNvPr id="24" name="Oval 23"/>
+          <p:cNvPr id="23" name="Oval 22"/>
           <p:cNvSpPr/>
           <p:nvPr/>
         </p:nvSpPr>
@@ -12320,7 +12084,7 @@
       </p:sp>
       <p:sp>
         <p:nvSpPr>
-          <p:cNvPr id="25" name="Oval 24"/>
+          <p:cNvPr id="24" name="Oval 23"/>
           <p:cNvSpPr/>
           <p:nvPr/>
         </p:nvSpPr>
@@ -12364,7 +12128,7 @@
       </p:sp>
       <p:sp>
         <p:nvSpPr>
-          <p:cNvPr id="26" name="Oval 25"/>
+          <p:cNvPr id="25" name="Oval 24"/>
           <p:cNvSpPr/>
           <p:nvPr/>
         </p:nvSpPr>
@@ -12408,7 +12172,7 @@
       </p:sp>
       <p:sp>
         <p:nvSpPr>
-          <p:cNvPr id="27" name="Oval 26"/>
+          <p:cNvPr id="26" name="Oval 25"/>
           <p:cNvSpPr/>
           <p:nvPr/>
         </p:nvSpPr>
@@ -12452,7 +12216,7 @@
       </p:sp>
       <p:sp>
         <p:nvSpPr>
-          <p:cNvPr id="28" name="Oval 27"/>
+          <p:cNvPr id="27" name="Oval 26"/>
           <p:cNvSpPr/>
           <p:nvPr/>
         </p:nvSpPr>
@@ -12496,7 +12260,7 @@
       </p:sp>
       <p:sp>
         <p:nvSpPr>
-          <p:cNvPr id="29" name="Oval 28"/>
+          <p:cNvPr id="28" name="Oval 27"/>
           <p:cNvSpPr/>
           <p:nvPr/>
         </p:nvSpPr>
@@ -12540,7 +12304,7 @@
       </p:sp>
       <p:sp>
         <p:nvSpPr>
-          <p:cNvPr id="30" name="Oval 29"/>
+          <p:cNvPr id="29" name="Oval 28"/>
           <p:cNvSpPr/>
           <p:nvPr/>
         </p:nvSpPr>
@@ -12584,7 +12348,7 @@
       </p:sp>
       <p:sp>
         <p:nvSpPr>
-          <p:cNvPr id="31" name="Oval 30"/>
+          <p:cNvPr id="30" name="Oval 29"/>
           <p:cNvSpPr/>
           <p:nvPr/>
         </p:nvSpPr>
@@ -12628,7 +12392,7 @@
       </p:sp>
       <p:sp>
         <p:nvSpPr>
-          <p:cNvPr id="32" name="Oval 31"/>
+          <p:cNvPr id="31" name="Oval 30"/>
           <p:cNvSpPr/>
           <p:nvPr/>
         </p:nvSpPr>
@@ -12672,7 +12436,7 @@
       </p:sp>
       <p:sp>
         <p:nvSpPr>
-          <p:cNvPr id="33" name="Oval 32"/>
+          <p:cNvPr id="32" name="Oval 31"/>
           <p:cNvSpPr/>
           <p:nvPr/>
         </p:nvSpPr>
@@ -12716,7 +12480,7 @@
       </p:sp>
       <p:sp>
         <p:nvSpPr>
-          <p:cNvPr id="34" name="Oval 33"/>
+          <p:cNvPr id="33" name="Oval 32"/>
           <p:cNvSpPr/>
           <p:nvPr/>
         </p:nvSpPr>
@@ -12760,7 +12524,7 @@
       </p:sp>
       <p:sp>
         <p:nvSpPr>
-          <p:cNvPr id="35" name="Oval 34"/>
+          <p:cNvPr id="34" name="Oval 33"/>
           <p:cNvSpPr/>
           <p:nvPr/>
         </p:nvSpPr>
@@ -12804,7 +12568,7 @@
       </p:sp>
       <p:sp>
         <p:nvSpPr>
-          <p:cNvPr id="36" name="Oval 35"/>
+          <p:cNvPr id="35" name="Oval 34"/>
           <p:cNvSpPr/>
           <p:nvPr/>
         </p:nvSpPr>
@@ -12848,7 +12612,7 @@
       </p:sp>
       <p:sp>
         <p:nvSpPr>
-          <p:cNvPr id="37" name="Oval 36"/>
+          <p:cNvPr id="36" name="Oval 35"/>
           <p:cNvSpPr/>
           <p:nvPr/>
         </p:nvSpPr>
@@ -12892,7 +12656,7 @@
       </p:sp>
       <p:sp>
         <p:nvSpPr>
-          <p:cNvPr id="38" name="Oval 37"/>
+          <p:cNvPr id="37" name="Oval 36"/>
           <p:cNvSpPr/>
           <p:nvPr/>
         </p:nvSpPr>
@@ -12936,7 +12700,7 @@
       </p:sp>
       <p:sp>
         <p:nvSpPr>
-          <p:cNvPr id="39" name="TextBox 38"/>
+          <p:cNvPr id="38" name="TextBox 37"/>
           <p:cNvSpPr txBox="1"/>
           <p:nvPr/>
         </p:nvSpPr>
@@ -12975,7 +12739,7 @@
       </p:sp>
       <p:sp>
         <p:nvSpPr>
-          <p:cNvPr id="40" name="TextBox 39"/>
+          <p:cNvPr id="39" name="TextBox 38"/>
           <p:cNvSpPr txBox="1"/>
           <p:nvPr/>
         </p:nvSpPr>
@@ -13014,7 +12778,7 @@
       </p:sp>
       <p:sp>
         <p:nvSpPr>
-          <p:cNvPr id="41" name="TextBox 40"/>
+          <p:cNvPr id="40" name="TextBox 39"/>
           <p:cNvSpPr txBox="1"/>
           <p:nvPr/>
         </p:nvSpPr>
@@ -13053,7 +12817,7 @@
       </p:sp>
       <p:sp>
         <p:nvSpPr>
-          <p:cNvPr id="42" name="TextBox 41"/>
+          <p:cNvPr id="41" name="TextBox 40"/>
           <p:cNvSpPr txBox="1"/>
           <p:nvPr/>
         </p:nvSpPr>
@@ -13092,7 +12856,7 @@
       </p:sp>
       <p:sp>
         <p:nvSpPr>
-          <p:cNvPr id="43" name="TextBox 42"/>
+          <p:cNvPr id="42" name="TextBox 41"/>
           <p:cNvSpPr txBox="1"/>
           <p:nvPr/>
         </p:nvSpPr>
@@ -13131,7 +12895,7 @@
       </p:sp>
       <p:sp>
         <p:nvSpPr>
-          <p:cNvPr id="44" name="TextBox 43"/>
+          <p:cNvPr id="43" name="TextBox 42"/>
           <p:cNvSpPr txBox="1"/>
           <p:nvPr/>
         </p:nvSpPr>
@@ -13170,7 +12934,7 @@
       </p:sp>
       <p:sp>
         <p:nvSpPr>
-          <p:cNvPr id="45" name="TextBox 44"/>
+          <p:cNvPr id="44" name="TextBox 43"/>
           <p:cNvSpPr txBox="1"/>
           <p:nvPr/>
         </p:nvSpPr>
@@ -13209,7 +12973,7 @@
       </p:sp>
       <p:sp>
         <p:nvSpPr>
-          <p:cNvPr id="46" name="TextBox 45"/>
+          <p:cNvPr id="45" name="TextBox 44"/>
           <p:cNvSpPr txBox="1"/>
           <p:nvPr/>
         </p:nvSpPr>
@@ -13248,7 +13012,7 @@
       </p:sp>
       <p:sp>
         <p:nvSpPr>
-          <p:cNvPr id="47" name="TextBox 46"/>
+          <p:cNvPr id="46" name="TextBox 45"/>
           <p:cNvSpPr txBox="1"/>
           <p:nvPr/>
         </p:nvSpPr>
@@ -13287,7 +13051,7 @@
       </p:sp>
       <p:sp>
         <p:nvSpPr>
-          <p:cNvPr id="48" name="Freeform 47"/>
+          <p:cNvPr id="47" name="Freeform 46"/>
           <p:cNvSpPr/>
           <p:nvPr/>
         </p:nvSpPr>
@@ -13358,7 +13122,7 @@
       </p:sp>
       <p:sp>
         <p:nvSpPr>
-          <p:cNvPr id="49" name="TextBox 48"/>
+          <p:cNvPr id="48" name="TextBox 47"/>
           <p:cNvSpPr txBox="1"/>
           <p:nvPr/>
         </p:nvSpPr>
@@ -13397,7 +13161,7 @@
       </p:sp>
       <p:sp>
         <p:nvSpPr>
-          <p:cNvPr id="50" name="Freeform 49"/>
+          <p:cNvPr id="49" name="Freeform 48"/>
           <p:cNvSpPr/>
           <p:nvPr/>
         </p:nvSpPr>
@@ -13468,7 +13232,7 @@
       </p:sp>
       <p:sp>
         <p:nvSpPr>
-          <p:cNvPr id="51" name="TextBox 50"/>
+          <p:cNvPr id="50" name="TextBox 49"/>
           <p:cNvSpPr txBox="1"/>
           <p:nvPr/>
         </p:nvSpPr>
@@ -13507,7 +13271,7 @@
       </p:sp>
       <p:sp>
         <p:nvSpPr>
-          <p:cNvPr id="52" name="Rectangle 51"/>
+          <p:cNvPr id="51" name="Rectangle 50"/>
           <p:cNvSpPr/>
           <p:nvPr/>
         </p:nvSpPr>
@@ -13551,7 +13315,7 @@
       </p:sp>
       <p:sp>
         <p:nvSpPr>
-          <p:cNvPr id="53" name="TextBox 52"/>
+          <p:cNvPr id="52" name="TextBox 51"/>
           <p:cNvSpPr txBox="1"/>
           <p:nvPr/>
         </p:nvSpPr>
@@ -13590,7 +13354,7 @@
       </p:sp>
       <p:sp>
         <p:nvSpPr>
-          <p:cNvPr id="54" name="TextBox 53"/>
+          <p:cNvPr id="53" name="TextBox 52"/>
           <p:cNvSpPr txBox="1"/>
           <p:nvPr/>
         </p:nvSpPr>

--- a/templates/posts/october/2026-10-05-mon-ig-teachers-day-trading-cards.pptx
+++ b/templates/posts/october/2026-10-05-mon-ig-teachers-day-trading-cards.pptx
@@ -4324,7 +4324,7 @@
       </p:sp>
       <p:pic>
         <p:nvPicPr>
-          <p:cNvPr id="4" name="Picture 3" descr="4511350508822684179.jpg"/>
+          <p:cNvPr id="4" name="Picture 3" descr="7658133130993077371.jpg"/>
           <p:cNvPicPr>
             <a:picLocks noChangeAspect="1"/>
           </p:cNvPicPr>
@@ -6624,7 +6624,7 @@
       </p:sp>
       <p:pic>
         <p:nvPicPr>
-          <p:cNvPr id="4" name="Picture 3" descr="4058738025366184175.jpg"/>
+          <p:cNvPr id="4" name="Picture 3" descr="8596170202528277365.jpg"/>
           <p:cNvPicPr>
             <a:picLocks noChangeAspect="1"/>
           </p:cNvPicPr>
@@ -8924,7 +8924,7 @@
       </p:sp>
       <p:pic>
         <p:nvPicPr>
-          <p:cNvPr id="4" name="Picture 3" descr="3463987928563633322.jpg"/>
+          <p:cNvPr id="4" name="Picture 3" descr="4729525718007545033.jpg"/>
           <p:cNvPicPr>
             <a:picLocks noChangeAspect="1"/>
           </p:cNvPicPr>
@@ -11224,7 +11224,7 @@
       </p:sp>
       <p:pic>
         <p:nvPicPr>
-          <p:cNvPr id="4" name="Picture 3" descr="7897438512424806890.jpg"/>
+          <p:cNvPr id="4" name="Picture 3" descr="5153510539159167184.jpg"/>
           <p:cNvPicPr>
             <a:picLocks noChangeAspect="1"/>
           </p:cNvPicPr>

--- a/templates/posts/october/2026-10-05-mon-ig-teachers-day-trading-cards.pptx
+++ b/templates/posts/october/2026-10-05-mon-ig-teachers-day-trading-cards.pptx
@@ -4324,7 +4324,7 @@
       </p:sp>
       <p:pic>
         <p:nvPicPr>
-          <p:cNvPr id="4" name="Picture 3" descr="7658133130993077371.jpg"/>
+          <p:cNvPr id="4" name="Picture 3" descr="1500398814426994648.jpg"/>
           <p:cNvPicPr>
             <a:picLocks noChangeAspect="1"/>
           </p:cNvPicPr>
@@ -6624,7 +6624,7 @@
       </p:sp>
       <p:pic>
         <p:nvPicPr>
-          <p:cNvPr id="4" name="Picture 3" descr="8596170202528277365.jpg"/>
+          <p:cNvPr id="4" name="Picture 3" descr="6785216618101045111.jpg"/>
           <p:cNvPicPr>
             <a:picLocks noChangeAspect="1"/>
           </p:cNvPicPr>
@@ -8924,7 +8924,7 @@
       </p:sp>
       <p:pic>
         <p:nvPicPr>
-          <p:cNvPr id="4" name="Picture 3" descr="4729525718007545033.jpg"/>
+          <p:cNvPr id="4" name="Picture 3" descr="3555897757468015068.jpg"/>
           <p:cNvPicPr>
             <a:picLocks noChangeAspect="1"/>
           </p:cNvPicPr>
@@ -11224,7 +11224,7 @@
       </p:sp>
       <p:pic>
         <p:nvPicPr>
-          <p:cNvPr id="4" name="Picture 3" descr="5153510539159167184.jpg"/>
+          <p:cNvPr id="4" name="Picture 3" descr="8570916478820365395.jpg"/>
           <p:cNvPicPr>
             <a:picLocks noChangeAspect="1"/>
           </p:cNvPicPr>

--- a/templates/posts/october/2026-10-05-mon-ig-teachers-day-trading-cards.pptx
+++ b/templates/posts/october/2026-10-05-mon-ig-teachers-day-trading-cards.pptx
@@ -4324,7 +4324,7 @@
       </p:sp>
       <p:pic>
         <p:nvPicPr>
-          <p:cNvPr id="4" name="Picture 3" descr="1500398814426994648.jpg"/>
+          <p:cNvPr id="4" name="Picture 3" descr="2917461652270346237.jpg"/>
           <p:cNvPicPr>
             <a:picLocks noChangeAspect="1"/>
           </p:cNvPicPr>
@@ -6624,7 +6624,7 @@
       </p:sp>
       <p:pic>
         <p:nvPicPr>
-          <p:cNvPr id="4" name="Picture 3" descr="6785216618101045111.jpg"/>
+          <p:cNvPr id="4" name="Picture 3" descr="9019412534059606627.jpg"/>
           <p:cNvPicPr>
             <a:picLocks noChangeAspect="1"/>
           </p:cNvPicPr>
@@ -8924,7 +8924,7 @@
       </p:sp>
       <p:pic>
         <p:nvPicPr>
-          <p:cNvPr id="4" name="Picture 3" descr="3555897757468015068.jpg"/>
+          <p:cNvPr id="4" name="Picture 3" descr="2579808240821109552.jpg"/>
           <p:cNvPicPr>
             <a:picLocks noChangeAspect="1"/>
           </p:cNvPicPr>
@@ -11224,7 +11224,7 @@
       </p:sp>
       <p:pic>
         <p:nvPicPr>
-          <p:cNvPr id="4" name="Picture 3" descr="8570916478820365395.jpg"/>
+          <p:cNvPr id="4" name="Picture 3" descr="3183544489575211938.jpg"/>
           <p:cNvPicPr>
             <a:picLocks noChangeAspect="1"/>
           </p:cNvPicPr>
@@ -13154,7 +13154,7 @@
                 </a:solidFill>
                 <a:latin typeface="Montserrat"/>
               </a:rPr>
-              <a:t>GERALD RAMIREZ</a:t>
+              <a:t>GERALD RAMÍREZ</a:t>
             </a:r>
           </a:p>
         </p:txBody>

--- a/templates/posts/october/2026-10-05-mon-ig-teachers-day-trading-cards.pptx
+++ b/templates/posts/october/2026-10-05-mon-ig-teachers-day-trading-cards.pptx
@@ -4324,7 +4324,7 @@
       </p:sp>
       <p:pic>
         <p:nvPicPr>
-          <p:cNvPr id="4" name="Picture 3" descr="2917461652270346237.jpg"/>
+          <p:cNvPr id="4" name="Picture 3" descr="1777178360486581189.jpg"/>
           <p:cNvPicPr>
             <a:picLocks noChangeAspect="1"/>
           </p:cNvPicPr>
@@ -5798,45 +5798,30 @@
           </a:p>
         </p:txBody>
       </p:sp>
-      <p:sp>
-        <p:nvSpPr>
-          <p:cNvPr id="38" name="TextBox 37"/>
-          <p:cNvSpPr txBox="1"/>
-          <p:nvPr/>
-        </p:nvSpPr>
-        <p:spPr>
-          <a:xfrm rot="180000">
-            <a:off x="7264054" y="2150558"/>
-            <a:ext cx="1714500" cy="476250"/>
+      <p:pic>
+        <p:nvPicPr>
+          <p:cNvPr id="38" name="Picture 37" descr="foundation-logo-color.png"/>
+          <p:cNvPicPr>
+            <a:picLocks noChangeAspect="1"/>
+          </p:cNvPicPr>
+          <p:nvPr/>
+        </p:nvPicPr>
+        <p:blipFill>
+          <a:blip r:embed="rId4"/>
+          <a:stretch>
+            <a:fillRect/>
+          </a:stretch>
+        </p:blipFill>
+        <p:spPr>
+          <a:xfrm rot="180000">
+            <a:off x="7597429" y="1917689"/>
+            <a:ext cx="1047750" cy="941987"/>
           </a:xfrm>
           <a:prstGeom prst="rect">
             <a:avLst/>
           </a:prstGeom>
-          <a:noFill/>
-        </p:spPr>
-        <p:txBody>
-          <a:bodyPr wrap="square" lIns="0" rIns="0" tIns="0" bIns="0" anchor="t">
-            <a:spAutoFit/>
-          </a:bodyPr>
-          <a:lstStyle/>
-          <a:p>
-            <a:pPr algn="ctr">
-              <a:lnSpc>
-                <a:spcPct val="120000"/>
-              </a:lnSpc>
-            </a:pPr>
-            <a:r>
-              <a:rPr sz="1800" b="1" i="0">
-                <a:solidFill>
-                  <a:srgbClr val="156826"/>
-                </a:solidFill>
-                <a:latin typeface="Montserrat"/>
-              </a:rPr>
-              <a:t>LOGO</a:t>
-            </a:r>
-          </a:p>
-        </p:txBody>
-      </p:sp>
+        </p:spPr>
+      </p:pic>
       <p:sp>
         <p:nvSpPr>
           <p:cNvPr id="39" name="TextBox 38"/>
@@ -6624,7 +6609,7 @@
       </p:sp>
       <p:pic>
         <p:nvPicPr>
-          <p:cNvPr id="4" name="Picture 3" descr="9019412534059606627.jpg"/>
+          <p:cNvPr id="4" name="Picture 3" descr="5595351576869054060.jpg"/>
           <p:cNvPicPr>
             <a:picLocks noChangeAspect="1"/>
           </p:cNvPicPr>
@@ -8098,45 +8083,30 @@
           </a:p>
         </p:txBody>
       </p:sp>
-      <p:sp>
-        <p:nvSpPr>
-          <p:cNvPr id="38" name="TextBox 37"/>
-          <p:cNvSpPr txBox="1"/>
-          <p:nvPr/>
-        </p:nvSpPr>
-        <p:spPr>
-          <a:xfrm rot="180000">
-            <a:off x="7264054" y="2150558"/>
-            <a:ext cx="1714500" cy="476250"/>
+      <p:pic>
+        <p:nvPicPr>
+          <p:cNvPr id="38" name="Picture 37" descr="foundation-logo-color.png"/>
+          <p:cNvPicPr>
+            <a:picLocks noChangeAspect="1"/>
+          </p:cNvPicPr>
+          <p:nvPr/>
+        </p:nvPicPr>
+        <p:blipFill>
+          <a:blip r:embed="rId4"/>
+          <a:stretch>
+            <a:fillRect/>
+          </a:stretch>
+        </p:blipFill>
+        <p:spPr>
+          <a:xfrm rot="180000">
+            <a:off x="7597429" y="1917689"/>
+            <a:ext cx="1047750" cy="941987"/>
           </a:xfrm>
           <a:prstGeom prst="rect">
             <a:avLst/>
           </a:prstGeom>
-          <a:noFill/>
-        </p:spPr>
-        <p:txBody>
-          <a:bodyPr wrap="square" lIns="0" rIns="0" tIns="0" bIns="0" anchor="t">
-            <a:spAutoFit/>
-          </a:bodyPr>
-          <a:lstStyle/>
-          <a:p>
-            <a:pPr algn="ctr">
-              <a:lnSpc>
-                <a:spcPct val="120000"/>
-              </a:lnSpc>
-            </a:pPr>
-            <a:r>
-              <a:rPr sz="1800" b="1" i="0">
-                <a:solidFill>
-                  <a:srgbClr val="156826"/>
-                </a:solidFill>
-                <a:latin typeface="Montserrat"/>
-              </a:rPr>
-              <a:t>LOGO</a:t>
-            </a:r>
-          </a:p>
-        </p:txBody>
-      </p:sp>
+        </p:spPr>
+      </p:pic>
       <p:sp>
         <p:nvSpPr>
           <p:cNvPr id="39" name="TextBox 38"/>
@@ -8924,7 +8894,7 @@
       </p:sp>
       <p:pic>
         <p:nvPicPr>
-          <p:cNvPr id="4" name="Picture 3" descr="2579808240821109552.jpg"/>
+          <p:cNvPr id="4" name="Picture 3" descr="141209792141385858.jpg"/>
           <p:cNvPicPr>
             <a:picLocks noChangeAspect="1"/>
           </p:cNvPicPr>
@@ -10398,45 +10368,30 @@
           </a:p>
         </p:txBody>
       </p:sp>
-      <p:sp>
-        <p:nvSpPr>
-          <p:cNvPr id="38" name="TextBox 37"/>
-          <p:cNvSpPr txBox="1"/>
-          <p:nvPr/>
-        </p:nvSpPr>
-        <p:spPr>
-          <a:xfrm rot="180000">
-            <a:off x="7264054" y="2150558"/>
-            <a:ext cx="1714500" cy="476250"/>
+      <p:pic>
+        <p:nvPicPr>
+          <p:cNvPr id="38" name="Picture 37" descr="foundation-logo-color.png"/>
+          <p:cNvPicPr>
+            <a:picLocks noChangeAspect="1"/>
+          </p:cNvPicPr>
+          <p:nvPr/>
+        </p:nvPicPr>
+        <p:blipFill>
+          <a:blip r:embed="rId4"/>
+          <a:stretch>
+            <a:fillRect/>
+          </a:stretch>
+        </p:blipFill>
+        <p:spPr>
+          <a:xfrm rot="180000">
+            <a:off x="7597429" y="1917689"/>
+            <a:ext cx="1047750" cy="941987"/>
           </a:xfrm>
           <a:prstGeom prst="rect">
             <a:avLst/>
           </a:prstGeom>
-          <a:noFill/>
-        </p:spPr>
-        <p:txBody>
-          <a:bodyPr wrap="square" lIns="0" rIns="0" tIns="0" bIns="0" anchor="t">
-            <a:spAutoFit/>
-          </a:bodyPr>
-          <a:lstStyle/>
-          <a:p>
-            <a:pPr algn="ctr">
-              <a:lnSpc>
-                <a:spcPct val="120000"/>
-              </a:lnSpc>
-            </a:pPr>
-            <a:r>
-              <a:rPr sz="1800" b="1" i="0">
-                <a:solidFill>
-                  <a:srgbClr val="156826"/>
-                </a:solidFill>
-                <a:latin typeface="Montserrat"/>
-              </a:rPr>
-              <a:t>LOGO</a:t>
-            </a:r>
-          </a:p>
-        </p:txBody>
-      </p:sp>
+        </p:spPr>
+      </p:pic>
       <p:sp>
         <p:nvSpPr>
           <p:cNvPr id="39" name="TextBox 38"/>
@@ -11224,7 +11179,7 @@
       </p:sp>
       <p:pic>
         <p:nvPicPr>
-          <p:cNvPr id="4" name="Picture 3" descr="3183544489575211938.jpg"/>
+          <p:cNvPr id="4" name="Picture 3" descr="8872118310774173954.jpg"/>
           <p:cNvPicPr>
             <a:picLocks noChangeAspect="1"/>
           </p:cNvPicPr>
@@ -12698,45 +12653,30 @@
           </a:p>
         </p:txBody>
       </p:sp>
-      <p:sp>
-        <p:nvSpPr>
-          <p:cNvPr id="38" name="TextBox 37"/>
-          <p:cNvSpPr txBox="1"/>
-          <p:nvPr/>
-        </p:nvSpPr>
-        <p:spPr>
-          <a:xfrm rot="180000">
-            <a:off x="7264054" y="2150558"/>
-            <a:ext cx="1714500" cy="476250"/>
+      <p:pic>
+        <p:nvPicPr>
+          <p:cNvPr id="38" name="Picture 37" descr="foundation-logo-color.png"/>
+          <p:cNvPicPr>
+            <a:picLocks noChangeAspect="1"/>
+          </p:cNvPicPr>
+          <p:nvPr/>
+        </p:nvPicPr>
+        <p:blipFill>
+          <a:blip r:embed="rId4"/>
+          <a:stretch>
+            <a:fillRect/>
+          </a:stretch>
+        </p:blipFill>
+        <p:spPr>
+          <a:xfrm rot="180000">
+            <a:off x="7597429" y="1917689"/>
+            <a:ext cx="1047750" cy="941987"/>
           </a:xfrm>
           <a:prstGeom prst="rect">
             <a:avLst/>
           </a:prstGeom>
-          <a:noFill/>
-        </p:spPr>
-        <p:txBody>
-          <a:bodyPr wrap="square" lIns="0" rIns="0" tIns="0" bIns="0" anchor="t">
-            <a:spAutoFit/>
-          </a:bodyPr>
-          <a:lstStyle/>
-          <a:p>
-            <a:pPr algn="ctr">
-              <a:lnSpc>
-                <a:spcPct val="120000"/>
-              </a:lnSpc>
-            </a:pPr>
-            <a:r>
-              <a:rPr sz="1800" b="1" i="0">
-                <a:solidFill>
-                  <a:srgbClr val="156826"/>
-                </a:solidFill>
-                <a:latin typeface="Montserrat"/>
-              </a:rPr>
-              <a:t>LOGO</a:t>
-            </a:r>
-          </a:p>
-        </p:txBody>
-      </p:sp>
+        </p:spPr>
+      </p:pic>
       <p:sp>
         <p:nvSpPr>
           <p:cNvPr id="39" name="TextBox 38"/>
@@ -15057,45 +14997,30 @@
           </a:p>
         </p:txBody>
       </p:sp>
-      <p:sp>
-        <p:nvSpPr>
-          <p:cNvPr id="39" name="TextBox 38"/>
-          <p:cNvSpPr txBox="1"/>
-          <p:nvPr/>
-        </p:nvSpPr>
-        <p:spPr>
-          <a:xfrm rot="180000">
-            <a:off x="7264054" y="2150558"/>
-            <a:ext cx="1714500" cy="476250"/>
+      <p:pic>
+        <p:nvPicPr>
+          <p:cNvPr id="39" name="Picture 38" descr="foundation-logo-color.png"/>
+          <p:cNvPicPr>
+            <a:picLocks noChangeAspect="1"/>
+          </p:cNvPicPr>
+          <p:nvPr/>
+        </p:nvPicPr>
+        <p:blipFill>
+          <a:blip r:embed="rId3"/>
+          <a:stretch>
+            <a:fillRect/>
+          </a:stretch>
+        </p:blipFill>
+        <p:spPr>
+          <a:xfrm rot="180000">
+            <a:off x="7597429" y="1917689"/>
+            <a:ext cx="1047750" cy="941987"/>
           </a:xfrm>
           <a:prstGeom prst="rect">
             <a:avLst/>
           </a:prstGeom>
-          <a:noFill/>
-        </p:spPr>
-        <p:txBody>
-          <a:bodyPr wrap="square" lIns="0" rIns="0" tIns="0" bIns="0" anchor="t">
-            <a:spAutoFit/>
-          </a:bodyPr>
-          <a:lstStyle/>
-          <a:p>
-            <a:pPr algn="ctr">
-              <a:lnSpc>
-                <a:spcPct val="120000"/>
-              </a:lnSpc>
-            </a:pPr>
-            <a:r>
-              <a:rPr sz="1800" b="1" i="0">
-                <a:solidFill>
-                  <a:srgbClr val="156826"/>
-                </a:solidFill>
-                <a:latin typeface="Montserrat"/>
-              </a:rPr>
-              <a:t>LOGO</a:t>
-            </a:r>
-          </a:p>
-        </p:txBody>
-      </p:sp>
+        </p:spPr>
+      </p:pic>
       <p:sp>
         <p:nvSpPr>
           <p:cNvPr id="40" name="TextBox 39"/>

--- a/templates/posts/october/2026-10-05-mon-ig-teachers-day-trading-cards.pptx
+++ b/templates/posts/october/2026-10-05-mon-ig-teachers-day-trading-cards.pptx
@@ -3930,7 +3930,7 @@
     <p:bg>
       <p:bgPr>
         <a:solidFill>
-          <a:srgbClr val="22371F"/>
+          <a:srgbClr val="1E3F1D"/>
         </a:solidFill>
         <a:effectLst/>
       </p:bgPr>
@@ -3972,7 +3972,7 @@
             <a:r>
               <a:rPr sz="6400" b="1" i="0">
                 <a:solidFill>
-                  <a:srgbClr val="F4F1EA"/>
+                  <a:srgbClr val="F3F1EA"/>
                 </a:solidFill>
                 <a:latin typeface="Montserrat"/>
               </a:rPr>
@@ -4002,7 +4002,7 @@
               <a:srgbClr val="E8E2D4"/>
             </a:fgClr>
             <a:bgClr>
-              <a:srgbClr val="F4F1EA"/>
+              <a:srgbClr val="F3F1EA"/>
             </a:bgClr>
           </a:pattFill>
           <a:ln>
@@ -4059,7 +4059,7 @@
               <a:srgbClr val="E8E2D4"/>
             </a:fgClr>
             <a:bgClr>
-              <a:srgbClr val="F4F1EA"/>
+              <a:srgbClr val="F3F1EA"/>
             </a:bgClr>
           </a:pattFill>
           <a:ln>
@@ -4116,7 +4116,7 @@
               <a:srgbClr val="E8E2D4"/>
             </a:fgClr>
             <a:bgClr>
-              <a:srgbClr val="F4F1EA"/>
+              <a:srgbClr val="F3F1EA"/>
             </a:bgClr>
           </a:pattFill>
           <a:ln>
@@ -4182,7 +4182,7 @@
             <a:r>
               <a:rPr sz="2000" b="0" i="0">
                 <a:solidFill>
-                  <a:srgbClr val="F4F1EA">
+                  <a:srgbClr val="F3F1EA">
                     <a:alpha val="60000"/>
                   </a:srgbClr>
                 </a:solidFill>
@@ -4207,7 +4207,7 @@
     <p:bg>
       <p:bgPr>
         <a:solidFill>
-          <a:srgbClr val="22371F"/>
+          <a:srgbClr val="1E3F1D"/>
         </a:solidFill>
         <a:effectLst/>
       </p:bgPr>
@@ -4240,7 +4240,7 @@
               <a:srgbClr val="E8E2D4"/>
             </a:fgClr>
             <a:bgClr>
-              <a:srgbClr val="F4F1EA"/>
+              <a:srgbClr val="F3F1EA"/>
             </a:bgClr>
           </a:pattFill>
           <a:ln>
@@ -4291,11 +4291,11 @@
             <a:avLst/>
           </a:prstGeom>
           <a:solidFill>
-            <a:srgbClr val="F4F1EA"/>
+            <a:srgbClr val="F3F1EA"/>
           </a:solidFill>
           <a:ln w="19050">
             <a:solidFill>
-              <a:srgbClr val="22371F"/>
+              <a:srgbClr val="1E3F1D"/>
             </a:solidFill>
           </a:ln>
           <a:effectLst/>
@@ -4324,7 +4324,7 @@
       </p:sp>
       <p:pic>
         <p:nvPicPr>
-          <p:cNvPr id="4" name="Picture 3" descr="1777178360486581189.jpg"/>
+          <p:cNvPr id="4" name="Picture 3" descr="4588039065079628338.jpg"/>
           <p:cNvPicPr>
             <a:picLocks noChangeAspect="1"/>
           </p:cNvPicPr>
@@ -4361,7 +4361,7 @@
             <a:avLst/>
           </a:prstGeom>
           <a:solidFill>
-            <a:srgbClr val="156826"/>
+            <a:srgbClr val="31662F"/>
           </a:solidFill>
           <a:ln>
             <a:noFill/>
@@ -4405,7 +4405,7 @@
             <a:avLst/>
           </a:prstGeom>
           <a:solidFill>
-            <a:srgbClr val="156826"/>
+            <a:srgbClr val="31662F"/>
           </a:solidFill>
           <a:ln>
             <a:noFill/>
@@ -4449,7 +4449,7 @@
             <a:avLst/>
           </a:prstGeom>
           <a:solidFill>
-            <a:srgbClr val="156826"/>
+            <a:srgbClr val="31662F"/>
           </a:solidFill>
           <a:ln>
             <a:noFill/>
@@ -4493,7 +4493,7 @@
             <a:avLst/>
           </a:prstGeom>
           <a:solidFill>
-            <a:srgbClr val="156826"/>
+            <a:srgbClr val="31662F"/>
           </a:solidFill>
           <a:ln>
             <a:noFill/>
@@ -4537,7 +4537,7 @@
             <a:avLst/>
           </a:prstGeom>
           <a:solidFill>
-            <a:srgbClr val="156826"/>
+            <a:srgbClr val="31662F"/>
           </a:solidFill>
           <a:ln>
             <a:noFill/>
@@ -4581,7 +4581,7 @@
             <a:avLst/>
           </a:prstGeom>
           <a:solidFill>
-            <a:srgbClr val="156826"/>
+            <a:srgbClr val="31662F"/>
           </a:solidFill>
           <a:ln>
             <a:noFill/>
@@ -4625,7 +4625,7 @@
             <a:avLst/>
           </a:prstGeom>
           <a:solidFill>
-            <a:srgbClr val="156826"/>
+            <a:srgbClr val="31662F"/>
           </a:solidFill>
           <a:ln>
             <a:noFill/>
@@ -4669,7 +4669,7 @@
             <a:avLst/>
           </a:prstGeom>
           <a:solidFill>
-            <a:srgbClr val="156826"/>
+            <a:srgbClr val="31662F"/>
           </a:solidFill>
           <a:ln>
             <a:noFill/>
@@ -4713,7 +4713,7 @@
             <a:avLst/>
           </a:prstGeom>
           <a:solidFill>
-            <a:srgbClr val="156826"/>
+            <a:srgbClr val="31662F"/>
           </a:solidFill>
           <a:ln>
             <a:noFill/>
@@ -4757,7 +4757,7 @@
             <a:avLst/>
           </a:prstGeom>
           <a:solidFill>
-            <a:srgbClr val="156826"/>
+            <a:srgbClr val="31662F"/>
           </a:solidFill>
           <a:ln>
             <a:noFill/>
@@ -4801,7 +4801,7 @@
             <a:avLst/>
           </a:prstGeom>
           <a:solidFill>
-            <a:srgbClr val="156826"/>
+            <a:srgbClr val="31662F"/>
           </a:solidFill>
           <a:ln>
             <a:noFill/>
@@ -4845,7 +4845,7 @@
             <a:avLst/>
           </a:prstGeom>
           <a:solidFill>
-            <a:srgbClr val="156826"/>
+            <a:srgbClr val="31662F"/>
           </a:solidFill>
           <a:ln>
             <a:noFill/>
@@ -4889,7 +4889,7 @@
             <a:avLst/>
           </a:prstGeom>
           <a:solidFill>
-            <a:srgbClr val="156826"/>
+            <a:srgbClr val="31662F"/>
           </a:solidFill>
           <a:ln>
             <a:noFill/>
@@ -4933,7 +4933,7 @@
             <a:avLst/>
           </a:prstGeom>
           <a:solidFill>
-            <a:srgbClr val="156826"/>
+            <a:srgbClr val="31662F"/>
           </a:solidFill>
           <a:ln>
             <a:noFill/>
@@ -4977,7 +4977,7 @@
             <a:avLst/>
           </a:prstGeom>
           <a:solidFill>
-            <a:srgbClr val="156826"/>
+            <a:srgbClr val="31662F"/>
           </a:solidFill>
           <a:ln>
             <a:noFill/>
@@ -5021,7 +5021,7 @@
             <a:avLst/>
           </a:prstGeom>
           <a:solidFill>
-            <a:srgbClr val="156826"/>
+            <a:srgbClr val="31662F"/>
           </a:solidFill>
           <a:ln>
             <a:noFill/>
@@ -5065,7 +5065,7 @@
             <a:avLst/>
           </a:prstGeom>
           <a:solidFill>
-            <a:srgbClr val="F4F1EA"/>
+            <a:srgbClr val="F3F1EA"/>
           </a:solidFill>
           <a:ln>
             <a:noFill/>
@@ -5109,7 +5109,7 @@
             <a:avLst/>
           </a:prstGeom>
           <a:solidFill>
-            <a:srgbClr val="F4F1EA"/>
+            <a:srgbClr val="F3F1EA"/>
           </a:solidFill>
           <a:ln>
             <a:noFill/>
@@ -5153,7 +5153,7 @@
             <a:avLst/>
           </a:prstGeom>
           <a:solidFill>
-            <a:srgbClr val="F4F1EA"/>
+            <a:srgbClr val="F3F1EA"/>
           </a:solidFill>
           <a:ln>
             <a:noFill/>
@@ -5197,7 +5197,7 @@
             <a:avLst/>
           </a:prstGeom>
           <a:solidFill>
-            <a:srgbClr val="F4F1EA"/>
+            <a:srgbClr val="F3F1EA"/>
           </a:solidFill>
           <a:ln>
             <a:noFill/>
@@ -5241,7 +5241,7 @@
             <a:avLst/>
           </a:prstGeom>
           <a:solidFill>
-            <a:srgbClr val="F4F1EA"/>
+            <a:srgbClr val="F3F1EA"/>
           </a:solidFill>
           <a:ln>
             <a:noFill/>
@@ -5285,7 +5285,7 @@
             <a:avLst/>
           </a:prstGeom>
           <a:solidFill>
-            <a:srgbClr val="F4F1EA"/>
+            <a:srgbClr val="F3F1EA"/>
           </a:solidFill>
           <a:ln>
             <a:noFill/>
@@ -5329,7 +5329,7 @@
             <a:avLst/>
           </a:prstGeom>
           <a:solidFill>
-            <a:srgbClr val="F4F1EA"/>
+            <a:srgbClr val="F3F1EA"/>
           </a:solidFill>
           <a:ln>
             <a:noFill/>
@@ -5373,7 +5373,7 @@
             <a:avLst/>
           </a:prstGeom>
           <a:solidFill>
-            <a:srgbClr val="F4F1EA"/>
+            <a:srgbClr val="F3F1EA"/>
           </a:solidFill>
           <a:ln>
             <a:noFill/>
@@ -5417,7 +5417,7 @@
             <a:avLst/>
           </a:prstGeom>
           <a:solidFill>
-            <a:srgbClr val="F4F1EA"/>
+            <a:srgbClr val="F3F1EA"/>
           </a:solidFill>
           <a:ln>
             <a:noFill/>
@@ -5461,7 +5461,7 @@
             <a:avLst/>
           </a:prstGeom>
           <a:solidFill>
-            <a:srgbClr val="F4F1EA"/>
+            <a:srgbClr val="F3F1EA"/>
           </a:solidFill>
           <a:ln>
             <a:noFill/>
@@ -5505,7 +5505,7 @@
             <a:avLst/>
           </a:prstGeom>
           <a:solidFill>
-            <a:srgbClr val="F4F1EA"/>
+            <a:srgbClr val="F3F1EA"/>
           </a:solidFill>
           <a:ln>
             <a:noFill/>
@@ -5549,7 +5549,7 @@
             <a:avLst/>
           </a:prstGeom>
           <a:solidFill>
-            <a:srgbClr val="F4F1EA"/>
+            <a:srgbClr val="F3F1EA"/>
           </a:solidFill>
           <a:ln>
             <a:noFill/>
@@ -5593,7 +5593,7 @@
             <a:avLst/>
           </a:prstGeom>
           <a:solidFill>
-            <a:srgbClr val="F4F1EA"/>
+            <a:srgbClr val="F3F1EA"/>
           </a:solidFill>
           <a:ln>
             <a:noFill/>
@@ -5637,7 +5637,7 @@
             <a:avLst/>
           </a:prstGeom>
           <a:solidFill>
-            <a:srgbClr val="F4F1EA"/>
+            <a:srgbClr val="F3F1EA"/>
           </a:solidFill>
           <a:ln>
             <a:noFill/>
@@ -5681,7 +5681,7 @@
             <a:avLst/>
           </a:prstGeom>
           <a:solidFill>
-            <a:srgbClr val="F4F1EA"/>
+            <a:srgbClr val="F3F1EA"/>
           </a:solidFill>
           <a:ln>
             <a:noFill/>
@@ -5725,7 +5725,7 @@
             <a:avLst/>
           </a:prstGeom>
           <a:solidFill>
-            <a:srgbClr val="F4F1EA"/>
+            <a:srgbClr val="F3F1EA"/>
           </a:solidFill>
           <a:ln>
             <a:noFill/>
@@ -5769,7 +5769,7 @@
             <a:avLst/>
           </a:prstGeom>
           <a:solidFill>
-            <a:srgbClr val="F4F1EA"/>
+            <a:srgbClr val="F3F1EA"/>
           </a:solidFill>
           <a:ln>
             <a:noFill/>
@@ -5852,7 +5852,7 @@
             <a:r>
               <a:rPr sz="2000" b="1" i="0" spc="200">
                 <a:solidFill>
-                  <a:srgbClr val="156826"/>
+                  <a:srgbClr val="31662F"/>
                 </a:solidFill>
                 <a:latin typeface="Montserrat"/>
               </a:rPr>
@@ -5930,7 +5930,7 @@
             <a:r>
               <a:rPr sz="2000" b="1" i="0" spc="200">
                 <a:solidFill>
-                  <a:srgbClr val="156826"/>
+                  <a:srgbClr val="31662F"/>
                 </a:solidFill>
                 <a:latin typeface="Montserrat"/>
               </a:rPr>
@@ -6008,7 +6008,7 @@
             <a:r>
               <a:rPr sz="2000" b="1" i="0" spc="200">
                 <a:solidFill>
-                  <a:srgbClr val="156826"/>
+                  <a:srgbClr val="31662F"/>
                 </a:solidFill>
                 <a:latin typeface="Montserrat"/>
               </a:rPr>
@@ -6086,7 +6086,7 @@
             <a:r>
               <a:rPr sz="2000" b="1" i="0" spc="200">
                 <a:solidFill>
-                  <a:srgbClr val="156826"/>
+                  <a:srgbClr val="31662F"/>
                 </a:solidFill>
                 <a:latin typeface="Montserrat"/>
               </a:rPr>
@@ -6176,7 +6176,7 @@
             </a:pathLst>
           </a:custGeom>
           <a:solidFill>
-            <a:srgbClr val="156826"/>
+            <a:srgbClr val="31662F"/>
           </a:solidFill>
           <a:ln>
             <a:noFill/>
@@ -6235,7 +6235,7 @@
             <a:r>
               <a:rPr sz="3800" b="1" i="0">
                 <a:solidFill>
-                  <a:srgbClr val="F4F1EA"/>
+                  <a:srgbClr val="F3F1EA"/>
                 </a:solidFill>
                 <a:latin typeface="Montserrat"/>
               </a:rPr>
@@ -6286,7 +6286,7 @@
             </a:pathLst>
           </a:custGeom>
           <a:solidFill>
-            <a:srgbClr val="22371F"/>
+            <a:srgbClr val="1E3F1D"/>
           </a:solidFill>
           <a:ln>
             <a:noFill/>
@@ -6345,7 +6345,7 @@
             <a:r>
               <a:rPr sz="2800" b="0" i="0">
                 <a:solidFill>
-                  <a:srgbClr val="DBE6A7"/>
+                  <a:srgbClr val="B1BCB1"/>
                 </a:solidFill>
                 <a:latin typeface="Source Sans 3"/>
               </a:rPr>
@@ -6369,7 +6369,7 @@
             <a:avLst/>
           </a:prstGeom>
           <a:solidFill>
-            <a:srgbClr val="4F3433"/>
+            <a:srgbClr val="4C3634"/>
           </a:solidFill>
           <a:ln>
             <a:noFill/>
@@ -6428,7 +6428,7 @@
             <a:r>
               <a:rPr sz="1800" b="0" i="0">
                 <a:solidFill>
-                  <a:srgbClr val="F4F1EA"/>
+                  <a:srgbClr val="F3F1EA"/>
                 </a:solidFill>
                 <a:latin typeface="Source Sans 3"/>
               </a:rPr>
@@ -6467,7 +6467,7 @@
             <a:r>
               <a:rPr sz="2000" b="0" i="0">
                 <a:solidFill>
-                  <a:srgbClr val="F4F1EA">
+                  <a:srgbClr val="F3F1EA">
                     <a:alpha val="60000"/>
                   </a:srgbClr>
                 </a:solidFill>
@@ -6492,7 +6492,7 @@
     <p:bg>
       <p:bgPr>
         <a:solidFill>
-          <a:srgbClr val="22371F"/>
+          <a:srgbClr val="1E3F1D"/>
         </a:solidFill>
         <a:effectLst/>
       </p:bgPr>
@@ -6525,7 +6525,7 @@
               <a:srgbClr val="E8E2D4"/>
             </a:fgClr>
             <a:bgClr>
-              <a:srgbClr val="F4F1EA"/>
+              <a:srgbClr val="F3F1EA"/>
             </a:bgClr>
           </a:pattFill>
           <a:ln>
@@ -6576,11 +6576,11 @@
             <a:avLst/>
           </a:prstGeom>
           <a:solidFill>
-            <a:srgbClr val="F4F1EA"/>
+            <a:srgbClr val="F3F1EA"/>
           </a:solidFill>
           <a:ln w="19050">
             <a:solidFill>
-              <a:srgbClr val="22371F"/>
+              <a:srgbClr val="1E3F1D"/>
             </a:solidFill>
           </a:ln>
           <a:effectLst/>
@@ -6609,7 +6609,7 @@
       </p:sp>
       <p:pic>
         <p:nvPicPr>
-          <p:cNvPr id="4" name="Picture 3" descr="5595351576869054060.jpg"/>
+          <p:cNvPr id="4" name="Picture 3" descr="7658215649391002052.jpg"/>
           <p:cNvPicPr>
             <a:picLocks noChangeAspect="1"/>
           </p:cNvPicPr>
@@ -6646,7 +6646,7 @@
             <a:avLst/>
           </a:prstGeom>
           <a:solidFill>
-            <a:srgbClr val="156826"/>
+            <a:srgbClr val="31662F"/>
           </a:solidFill>
           <a:ln>
             <a:noFill/>
@@ -6690,7 +6690,7 @@
             <a:avLst/>
           </a:prstGeom>
           <a:solidFill>
-            <a:srgbClr val="156826"/>
+            <a:srgbClr val="31662F"/>
           </a:solidFill>
           <a:ln>
             <a:noFill/>
@@ -6734,7 +6734,7 @@
             <a:avLst/>
           </a:prstGeom>
           <a:solidFill>
-            <a:srgbClr val="156826"/>
+            <a:srgbClr val="31662F"/>
           </a:solidFill>
           <a:ln>
             <a:noFill/>
@@ -6778,7 +6778,7 @@
             <a:avLst/>
           </a:prstGeom>
           <a:solidFill>
-            <a:srgbClr val="156826"/>
+            <a:srgbClr val="31662F"/>
           </a:solidFill>
           <a:ln>
             <a:noFill/>
@@ -6822,7 +6822,7 @@
             <a:avLst/>
           </a:prstGeom>
           <a:solidFill>
-            <a:srgbClr val="156826"/>
+            <a:srgbClr val="31662F"/>
           </a:solidFill>
           <a:ln>
             <a:noFill/>
@@ -6866,7 +6866,7 @@
             <a:avLst/>
           </a:prstGeom>
           <a:solidFill>
-            <a:srgbClr val="156826"/>
+            <a:srgbClr val="31662F"/>
           </a:solidFill>
           <a:ln>
             <a:noFill/>
@@ -6910,7 +6910,7 @@
             <a:avLst/>
           </a:prstGeom>
           <a:solidFill>
-            <a:srgbClr val="156826"/>
+            <a:srgbClr val="31662F"/>
           </a:solidFill>
           <a:ln>
             <a:noFill/>
@@ -6954,7 +6954,7 @@
             <a:avLst/>
           </a:prstGeom>
           <a:solidFill>
-            <a:srgbClr val="156826"/>
+            <a:srgbClr val="31662F"/>
           </a:solidFill>
           <a:ln>
             <a:noFill/>
@@ -6998,7 +6998,7 @@
             <a:avLst/>
           </a:prstGeom>
           <a:solidFill>
-            <a:srgbClr val="156826"/>
+            <a:srgbClr val="31662F"/>
           </a:solidFill>
           <a:ln>
             <a:noFill/>
@@ -7042,7 +7042,7 @@
             <a:avLst/>
           </a:prstGeom>
           <a:solidFill>
-            <a:srgbClr val="156826"/>
+            <a:srgbClr val="31662F"/>
           </a:solidFill>
           <a:ln>
             <a:noFill/>
@@ -7086,7 +7086,7 @@
             <a:avLst/>
           </a:prstGeom>
           <a:solidFill>
-            <a:srgbClr val="156826"/>
+            <a:srgbClr val="31662F"/>
           </a:solidFill>
           <a:ln>
             <a:noFill/>
@@ -7130,7 +7130,7 @@
             <a:avLst/>
           </a:prstGeom>
           <a:solidFill>
-            <a:srgbClr val="156826"/>
+            <a:srgbClr val="31662F"/>
           </a:solidFill>
           <a:ln>
             <a:noFill/>
@@ -7174,7 +7174,7 @@
             <a:avLst/>
           </a:prstGeom>
           <a:solidFill>
-            <a:srgbClr val="156826"/>
+            <a:srgbClr val="31662F"/>
           </a:solidFill>
           <a:ln>
             <a:noFill/>
@@ -7218,7 +7218,7 @@
             <a:avLst/>
           </a:prstGeom>
           <a:solidFill>
-            <a:srgbClr val="156826"/>
+            <a:srgbClr val="31662F"/>
           </a:solidFill>
           <a:ln>
             <a:noFill/>
@@ -7262,7 +7262,7 @@
             <a:avLst/>
           </a:prstGeom>
           <a:solidFill>
-            <a:srgbClr val="156826"/>
+            <a:srgbClr val="31662F"/>
           </a:solidFill>
           <a:ln>
             <a:noFill/>
@@ -7306,7 +7306,7 @@
             <a:avLst/>
           </a:prstGeom>
           <a:solidFill>
-            <a:srgbClr val="156826"/>
+            <a:srgbClr val="31662F"/>
           </a:solidFill>
           <a:ln>
             <a:noFill/>
@@ -7350,7 +7350,7 @@
             <a:avLst/>
           </a:prstGeom>
           <a:solidFill>
-            <a:srgbClr val="F4F1EA"/>
+            <a:srgbClr val="F3F1EA"/>
           </a:solidFill>
           <a:ln>
             <a:noFill/>
@@ -7394,7 +7394,7 @@
             <a:avLst/>
           </a:prstGeom>
           <a:solidFill>
-            <a:srgbClr val="F4F1EA"/>
+            <a:srgbClr val="F3F1EA"/>
           </a:solidFill>
           <a:ln>
             <a:noFill/>
@@ -7438,7 +7438,7 @@
             <a:avLst/>
           </a:prstGeom>
           <a:solidFill>
-            <a:srgbClr val="F4F1EA"/>
+            <a:srgbClr val="F3F1EA"/>
           </a:solidFill>
           <a:ln>
             <a:noFill/>
@@ -7482,7 +7482,7 @@
             <a:avLst/>
           </a:prstGeom>
           <a:solidFill>
-            <a:srgbClr val="F4F1EA"/>
+            <a:srgbClr val="F3F1EA"/>
           </a:solidFill>
           <a:ln>
             <a:noFill/>
@@ -7526,7 +7526,7 @@
             <a:avLst/>
           </a:prstGeom>
           <a:solidFill>
-            <a:srgbClr val="F4F1EA"/>
+            <a:srgbClr val="F3F1EA"/>
           </a:solidFill>
           <a:ln>
             <a:noFill/>
@@ -7570,7 +7570,7 @@
             <a:avLst/>
           </a:prstGeom>
           <a:solidFill>
-            <a:srgbClr val="F4F1EA"/>
+            <a:srgbClr val="F3F1EA"/>
           </a:solidFill>
           <a:ln>
             <a:noFill/>
@@ -7614,7 +7614,7 @@
             <a:avLst/>
           </a:prstGeom>
           <a:solidFill>
-            <a:srgbClr val="F4F1EA"/>
+            <a:srgbClr val="F3F1EA"/>
           </a:solidFill>
           <a:ln>
             <a:noFill/>
@@ -7658,7 +7658,7 @@
             <a:avLst/>
           </a:prstGeom>
           <a:solidFill>
-            <a:srgbClr val="F4F1EA"/>
+            <a:srgbClr val="F3F1EA"/>
           </a:solidFill>
           <a:ln>
             <a:noFill/>
@@ -7702,7 +7702,7 @@
             <a:avLst/>
           </a:prstGeom>
           <a:solidFill>
-            <a:srgbClr val="F4F1EA"/>
+            <a:srgbClr val="F3F1EA"/>
           </a:solidFill>
           <a:ln>
             <a:noFill/>
@@ -7746,7 +7746,7 @@
             <a:avLst/>
           </a:prstGeom>
           <a:solidFill>
-            <a:srgbClr val="F4F1EA"/>
+            <a:srgbClr val="F3F1EA"/>
           </a:solidFill>
           <a:ln>
             <a:noFill/>
@@ -7790,7 +7790,7 @@
             <a:avLst/>
           </a:prstGeom>
           <a:solidFill>
-            <a:srgbClr val="F4F1EA"/>
+            <a:srgbClr val="F3F1EA"/>
           </a:solidFill>
           <a:ln>
             <a:noFill/>
@@ -7834,7 +7834,7 @@
             <a:avLst/>
           </a:prstGeom>
           <a:solidFill>
-            <a:srgbClr val="F4F1EA"/>
+            <a:srgbClr val="F3F1EA"/>
           </a:solidFill>
           <a:ln>
             <a:noFill/>
@@ -7878,7 +7878,7 @@
             <a:avLst/>
           </a:prstGeom>
           <a:solidFill>
-            <a:srgbClr val="F4F1EA"/>
+            <a:srgbClr val="F3F1EA"/>
           </a:solidFill>
           <a:ln>
             <a:noFill/>
@@ -7922,7 +7922,7 @@
             <a:avLst/>
           </a:prstGeom>
           <a:solidFill>
-            <a:srgbClr val="F4F1EA"/>
+            <a:srgbClr val="F3F1EA"/>
           </a:solidFill>
           <a:ln>
             <a:noFill/>
@@ -7966,7 +7966,7 @@
             <a:avLst/>
           </a:prstGeom>
           <a:solidFill>
-            <a:srgbClr val="F4F1EA"/>
+            <a:srgbClr val="F3F1EA"/>
           </a:solidFill>
           <a:ln>
             <a:noFill/>
@@ -8010,7 +8010,7 @@
             <a:avLst/>
           </a:prstGeom>
           <a:solidFill>
-            <a:srgbClr val="F4F1EA"/>
+            <a:srgbClr val="F3F1EA"/>
           </a:solidFill>
           <a:ln>
             <a:noFill/>
@@ -8054,7 +8054,7 @@
             <a:avLst/>
           </a:prstGeom>
           <a:solidFill>
-            <a:srgbClr val="F4F1EA"/>
+            <a:srgbClr val="F3F1EA"/>
           </a:solidFill>
           <a:ln>
             <a:noFill/>
@@ -8137,7 +8137,7 @@
             <a:r>
               <a:rPr sz="2000" b="1" i="0" spc="200">
                 <a:solidFill>
-                  <a:srgbClr val="156826"/>
+                  <a:srgbClr val="31662F"/>
                 </a:solidFill>
                 <a:latin typeface="Montserrat"/>
               </a:rPr>
@@ -8215,7 +8215,7 @@
             <a:r>
               <a:rPr sz="2000" b="1" i="0" spc="200">
                 <a:solidFill>
-                  <a:srgbClr val="156826"/>
+                  <a:srgbClr val="31662F"/>
                 </a:solidFill>
                 <a:latin typeface="Montserrat"/>
               </a:rPr>
@@ -8293,7 +8293,7 @@
             <a:r>
               <a:rPr sz="2000" b="1" i="0" spc="200">
                 <a:solidFill>
-                  <a:srgbClr val="156826"/>
+                  <a:srgbClr val="31662F"/>
                 </a:solidFill>
                 <a:latin typeface="Montserrat"/>
               </a:rPr>
@@ -8371,7 +8371,7 @@
             <a:r>
               <a:rPr sz="2000" b="1" i="0" spc="200">
                 <a:solidFill>
-                  <a:srgbClr val="156826"/>
+                  <a:srgbClr val="31662F"/>
                 </a:solidFill>
                 <a:latin typeface="Montserrat"/>
               </a:rPr>
@@ -8461,7 +8461,7 @@
             </a:pathLst>
           </a:custGeom>
           <a:solidFill>
-            <a:srgbClr val="156826"/>
+            <a:srgbClr val="31662F"/>
           </a:solidFill>
           <a:ln>
             <a:noFill/>
@@ -8520,7 +8520,7 @@
             <a:r>
               <a:rPr sz="5000" b="1" i="0">
                 <a:solidFill>
-                  <a:srgbClr val="F4F1EA"/>
+                  <a:srgbClr val="F3F1EA"/>
                 </a:solidFill>
                 <a:latin typeface="Montserrat"/>
               </a:rPr>
@@ -8571,7 +8571,7 @@
             </a:pathLst>
           </a:custGeom>
           <a:solidFill>
-            <a:srgbClr val="22371F"/>
+            <a:srgbClr val="1E3F1D"/>
           </a:solidFill>
           <a:ln>
             <a:noFill/>
@@ -8630,7 +8630,7 @@
             <a:r>
               <a:rPr sz="2800" b="0" i="0">
                 <a:solidFill>
-                  <a:srgbClr val="DBE6A7"/>
+                  <a:srgbClr val="B1BCB1"/>
                 </a:solidFill>
                 <a:latin typeface="Source Sans 3"/>
               </a:rPr>
@@ -8654,7 +8654,7 @@
             <a:avLst/>
           </a:prstGeom>
           <a:solidFill>
-            <a:srgbClr val="4F3433"/>
+            <a:srgbClr val="4C3634"/>
           </a:solidFill>
           <a:ln>
             <a:noFill/>
@@ -8713,7 +8713,7 @@
             <a:r>
               <a:rPr sz="1800" b="0" i="0">
                 <a:solidFill>
-                  <a:srgbClr val="F4F1EA"/>
+                  <a:srgbClr val="F3F1EA"/>
                 </a:solidFill>
                 <a:latin typeface="Source Sans 3"/>
               </a:rPr>
@@ -8752,7 +8752,7 @@
             <a:r>
               <a:rPr sz="2000" b="0" i="0">
                 <a:solidFill>
-                  <a:srgbClr val="F4F1EA">
+                  <a:srgbClr val="F3F1EA">
                     <a:alpha val="60000"/>
                   </a:srgbClr>
                 </a:solidFill>
@@ -8777,7 +8777,7 @@
     <p:bg>
       <p:bgPr>
         <a:solidFill>
-          <a:srgbClr val="22371F"/>
+          <a:srgbClr val="1E3F1D"/>
         </a:solidFill>
         <a:effectLst/>
       </p:bgPr>
@@ -8810,7 +8810,7 @@
               <a:srgbClr val="E8E2D4"/>
             </a:fgClr>
             <a:bgClr>
-              <a:srgbClr val="F4F1EA"/>
+              <a:srgbClr val="F3F1EA"/>
             </a:bgClr>
           </a:pattFill>
           <a:ln>
@@ -8861,11 +8861,11 @@
             <a:avLst/>
           </a:prstGeom>
           <a:solidFill>
-            <a:srgbClr val="F4F1EA"/>
+            <a:srgbClr val="F3F1EA"/>
           </a:solidFill>
           <a:ln w="19050">
             <a:solidFill>
-              <a:srgbClr val="22371F"/>
+              <a:srgbClr val="1E3F1D"/>
             </a:solidFill>
           </a:ln>
           <a:effectLst/>
@@ -8894,7 +8894,7 @@
       </p:sp>
       <p:pic>
         <p:nvPicPr>
-          <p:cNvPr id="4" name="Picture 3" descr="141209792141385858.jpg"/>
+          <p:cNvPr id="4" name="Picture 3" descr="5162148524607078864.jpg"/>
           <p:cNvPicPr>
             <a:picLocks noChangeAspect="1"/>
           </p:cNvPicPr>
@@ -8931,7 +8931,7 @@
             <a:avLst/>
           </a:prstGeom>
           <a:solidFill>
-            <a:srgbClr val="156826"/>
+            <a:srgbClr val="31662F"/>
           </a:solidFill>
           <a:ln>
             <a:noFill/>
@@ -8975,7 +8975,7 @@
             <a:avLst/>
           </a:prstGeom>
           <a:solidFill>
-            <a:srgbClr val="156826"/>
+            <a:srgbClr val="31662F"/>
           </a:solidFill>
           <a:ln>
             <a:noFill/>
@@ -9019,7 +9019,7 @@
             <a:avLst/>
           </a:prstGeom>
           <a:solidFill>
-            <a:srgbClr val="156826"/>
+            <a:srgbClr val="31662F"/>
           </a:solidFill>
           <a:ln>
             <a:noFill/>
@@ -9063,7 +9063,7 @@
             <a:avLst/>
           </a:prstGeom>
           <a:solidFill>
-            <a:srgbClr val="156826"/>
+            <a:srgbClr val="31662F"/>
           </a:solidFill>
           <a:ln>
             <a:noFill/>
@@ -9107,7 +9107,7 @@
             <a:avLst/>
           </a:prstGeom>
           <a:solidFill>
-            <a:srgbClr val="156826"/>
+            <a:srgbClr val="31662F"/>
           </a:solidFill>
           <a:ln>
             <a:noFill/>
@@ -9151,7 +9151,7 @@
             <a:avLst/>
           </a:prstGeom>
           <a:solidFill>
-            <a:srgbClr val="156826"/>
+            <a:srgbClr val="31662F"/>
           </a:solidFill>
           <a:ln>
             <a:noFill/>
@@ -9195,7 +9195,7 @@
             <a:avLst/>
           </a:prstGeom>
           <a:solidFill>
-            <a:srgbClr val="156826"/>
+            <a:srgbClr val="31662F"/>
           </a:solidFill>
           <a:ln>
             <a:noFill/>
@@ -9239,7 +9239,7 @@
             <a:avLst/>
           </a:prstGeom>
           <a:solidFill>
-            <a:srgbClr val="156826"/>
+            <a:srgbClr val="31662F"/>
           </a:solidFill>
           <a:ln>
             <a:noFill/>
@@ -9283,7 +9283,7 @@
             <a:avLst/>
           </a:prstGeom>
           <a:solidFill>
-            <a:srgbClr val="156826"/>
+            <a:srgbClr val="31662F"/>
           </a:solidFill>
           <a:ln>
             <a:noFill/>
@@ -9327,7 +9327,7 @@
             <a:avLst/>
           </a:prstGeom>
           <a:solidFill>
-            <a:srgbClr val="156826"/>
+            <a:srgbClr val="31662F"/>
           </a:solidFill>
           <a:ln>
             <a:noFill/>
@@ -9371,7 +9371,7 @@
             <a:avLst/>
           </a:prstGeom>
           <a:solidFill>
-            <a:srgbClr val="156826"/>
+            <a:srgbClr val="31662F"/>
           </a:solidFill>
           <a:ln>
             <a:noFill/>
@@ -9415,7 +9415,7 @@
             <a:avLst/>
           </a:prstGeom>
           <a:solidFill>
-            <a:srgbClr val="156826"/>
+            <a:srgbClr val="31662F"/>
           </a:solidFill>
           <a:ln>
             <a:noFill/>
@@ -9459,7 +9459,7 @@
             <a:avLst/>
           </a:prstGeom>
           <a:solidFill>
-            <a:srgbClr val="156826"/>
+            <a:srgbClr val="31662F"/>
           </a:solidFill>
           <a:ln>
             <a:noFill/>
@@ -9503,7 +9503,7 @@
             <a:avLst/>
           </a:prstGeom>
           <a:solidFill>
-            <a:srgbClr val="156826"/>
+            <a:srgbClr val="31662F"/>
           </a:solidFill>
           <a:ln>
             <a:noFill/>
@@ -9547,7 +9547,7 @@
             <a:avLst/>
           </a:prstGeom>
           <a:solidFill>
-            <a:srgbClr val="156826"/>
+            <a:srgbClr val="31662F"/>
           </a:solidFill>
           <a:ln>
             <a:noFill/>
@@ -9591,7 +9591,7 @@
             <a:avLst/>
           </a:prstGeom>
           <a:solidFill>
-            <a:srgbClr val="156826"/>
+            <a:srgbClr val="31662F"/>
           </a:solidFill>
           <a:ln>
             <a:noFill/>
@@ -9635,7 +9635,7 @@
             <a:avLst/>
           </a:prstGeom>
           <a:solidFill>
-            <a:srgbClr val="F4F1EA"/>
+            <a:srgbClr val="F3F1EA"/>
           </a:solidFill>
           <a:ln>
             <a:noFill/>
@@ -9679,7 +9679,7 @@
             <a:avLst/>
           </a:prstGeom>
           <a:solidFill>
-            <a:srgbClr val="F4F1EA"/>
+            <a:srgbClr val="F3F1EA"/>
           </a:solidFill>
           <a:ln>
             <a:noFill/>
@@ -9723,7 +9723,7 @@
             <a:avLst/>
           </a:prstGeom>
           <a:solidFill>
-            <a:srgbClr val="F4F1EA"/>
+            <a:srgbClr val="F3F1EA"/>
           </a:solidFill>
           <a:ln>
             <a:noFill/>
@@ -9767,7 +9767,7 @@
             <a:avLst/>
           </a:prstGeom>
           <a:solidFill>
-            <a:srgbClr val="F4F1EA"/>
+            <a:srgbClr val="F3F1EA"/>
           </a:solidFill>
           <a:ln>
             <a:noFill/>
@@ -9811,7 +9811,7 @@
             <a:avLst/>
           </a:prstGeom>
           <a:solidFill>
-            <a:srgbClr val="F4F1EA"/>
+            <a:srgbClr val="F3F1EA"/>
           </a:solidFill>
           <a:ln>
             <a:noFill/>
@@ -9855,7 +9855,7 @@
             <a:avLst/>
           </a:prstGeom>
           <a:solidFill>
-            <a:srgbClr val="F4F1EA"/>
+            <a:srgbClr val="F3F1EA"/>
           </a:solidFill>
           <a:ln>
             <a:noFill/>
@@ -9899,7 +9899,7 @@
             <a:avLst/>
           </a:prstGeom>
           <a:solidFill>
-            <a:srgbClr val="F4F1EA"/>
+            <a:srgbClr val="F3F1EA"/>
           </a:solidFill>
           <a:ln>
             <a:noFill/>
@@ -9943,7 +9943,7 @@
             <a:avLst/>
           </a:prstGeom>
           <a:solidFill>
-            <a:srgbClr val="F4F1EA"/>
+            <a:srgbClr val="F3F1EA"/>
           </a:solidFill>
           <a:ln>
             <a:noFill/>
@@ -9987,7 +9987,7 @@
             <a:avLst/>
           </a:prstGeom>
           <a:solidFill>
-            <a:srgbClr val="F4F1EA"/>
+            <a:srgbClr val="F3F1EA"/>
           </a:solidFill>
           <a:ln>
             <a:noFill/>
@@ -10031,7 +10031,7 @@
             <a:avLst/>
           </a:prstGeom>
           <a:solidFill>
-            <a:srgbClr val="F4F1EA"/>
+            <a:srgbClr val="F3F1EA"/>
           </a:solidFill>
           <a:ln>
             <a:noFill/>
@@ -10075,7 +10075,7 @@
             <a:avLst/>
           </a:prstGeom>
           <a:solidFill>
-            <a:srgbClr val="F4F1EA"/>
+            <a:srgbClr val="F3F1EA"/>
           </a:solidFill>
           <a:ln>
             <a:noFill/>
@@ -10119,7 +10119,7 @@
             <a:avLst/>
           </a:prstGeom>
           <a:solidFill>
-            <a:srgbClr val="F4F1EA"/>
+            <a:srgbClr val="F3F1EA"/>
           </a:solidFill>
           <a:ln>
             <a:noFill/>
@@ -10163,7 +10163,7 @@
             <a:avLst/>
           </a:prstGeom>
           <a:solidFill>
-            <a:srgbClr val="F4F1EA"/>
+            <a:srgbClr val="F3F1EA"/>
           </a:solidFill>
           <a:ln>
             <a:noFill/>
@@ -10207,7 +10207,7 @@
             <a:avLst/>
           </a:prstGeom>
           <a:solidFill>
-            <a:srgbClr val="F4F1EA"/>
+            <a:srgbClr val="F3F1EA"/>
           </a:solidFill>
           <a:ln>
             <a:noFill/>
@@ -10251,7 +10251,7 @@
             <a:avLst/>
           </a:prstGeom>
           <a:solidFill>
-            <a:srgbClr val="F4F1EA"/>
+            <a:srgbClr val="F3F1EA"/>
           </a:solidFill>
           <a:ln>
             <a:noFill/>
@@ -10295,7 +10295,7 @@
             <a:avLst/>
           </a:prstGeom>
           <a:solidFill>
-            <a:srgbClr val="F4F1EA"/>
+            <a:srgbClr val="F3F1EA"/>
           </a:solidFill>
           <a:ln>
             <a:noFill/>
@@ -10339,7 +10339,7 @@
             <a:avLst/>
           </a:prstGeom>
           <a:solidFill>
-            <a:srgbClr val="F4F1EA"/>
+            <a:srgbClr val="F3F1EA"/>
           </a:solidFill>
           <a:ln>
             <a:noFill/>
@@ -10422,7 +10422,7 @@
             <a:r>
               <a:rPr sz="2000" b="1" i="0" spc="200">
                 <a:solidFill>
-                  <a:srgbClr val="156826"/>
+                  <a:srgbClr val="31662F"/>
                 </a:solidFill>
                 <a:latin typeface="Montserrat"/>
               </a:rPr>
@@ -10500,7 +10500,7 @@
             <a:r>
               <a:rPr sz="2000" b="1" i="0" spc="200">
                 <a:solidFill>
-                  <a:srgbClr val="156826"/>
+                  <a:srgbClr val="31662F"/>
                 </a:solidFill>
                 <a:latin typeface="Montserrat"/>
               </a:rPr>
@@ -10578,7 +10578,7 @@
             <a:r>
               <a:rPr sz="2000" b="1" i="0" spc="200">
                 <a:solidFill>
-                  <a:srgbClr val="156826"/>
+                  <a:srgbClr val="31662F"/>
                 </a:solidFill>
                 <a:latin typeface="Montserrat"/>
               </a:rPr>
@@ -10656,7 +10656,7 @@
             <a:r>
               <a:rPr sz="2000" b="1" i="0" spc="200">
                 <a:solidFill>
-                  <a:srgbClr val="156826"/>
+                  <a:srgbClr val="31662F"/>
                 </a:solidFill>
                 <a:latin typeface="Montserrat"/>
               </a:rPr>
@@ -10746,7 +10746,7 @@
             </a:pathLst>
           </a:custGeom>
           <a:solidFill>
-            <a:srgbClr val="156826"/>
+            <a:srgbClr val="31662F"/>
           </a:solidFill>
           <a:ln>
             <a:noFill/>
@@ -10805,7 +10805,7 @@
             <a:r>
               <a:rPr sz="5000" b="1" i="0">
                 <a:solidFill>
-                  <a:srgbClr val="F4F1EA"/>
+                  <a:srgbClr val="F3F1EA"/>
                 </a:solidFill>
                 <a:latin typeface="Montserrat"/>
               </a:rPr>
@@ -10856,7 +10856,7 @@
             </a:pathLst>
           </a:custGeom>
           <a:solidFill>
-            <a:srgbClr val="22371F"/>
+            <a:srgbClr val="1E3F1D"/>
           </a:solidFill>
           <a:ln>
             <a:noFill/>
@@ -10915,7 +10915,7 @@
             <a:r>
               <a:rPr sz="2800" b="0" i="0">
                 <a:solidFill>
-                  <a:srgbClr val="DBE6A7"/>
+                  <a:srgbClr val="B1BCB1"/>
                 </a:solidFill>
                 <a:latin typeface="Source Sans 3"/>
               </a:rPr>
@@ -10939,7 +10939,7 @@
             <a:avLst/>
           </a:prstGeom>
           <a:solidFill>
-            <a:srgbClr val="4F3433"/>
+            <a:srgbClr val="4C3634"/>
           </a:solidFill>
           <a:ln>
             <a:noFill/>
@@ -10998,7 +10998,7 @@
             <a:r>
               <a:rPr sz="1800" b="0" i="0">
                 <a:solidFill>
-                  <a:srgbClr val="F4F1EA"/>
+                  <a:srgbClr val="F3F1EA"/>
                 </a:solidFill>
                 <a:latin typeface="Source Sans 3"/>
               </a:rPr>
@@ -11037,7 +11037,7 @@
             <a:r>
               <a:rPr sz="2000" b="0" i="0">
                 <a:solidFill>
-                  <a:srgbClr val="F4F1EA">
+                  <a:srgbClr val="F3F1EA">
                     <a:alpha val="60000"/>
                   </a:srgbClr>
                 </a:solidFill>
@@ -11062,7 +11062,7 @@
     <p:bg>
       <p:bgPr>
         <a:solidFill>
-          <a:srgbClr val="22371F"/>
+          <a:srgbClr val="1E3F1D"/>
         </a:solidFill>
         <a:effectLst/>
       </p:bgPr>
@@ -11095,7 +11095,7 @@
               <a:srgbClr val="E8E2D4"/>
             </a:fgClr>
             <a:bgClr>
-              <a:srgbClr val="F4F1EA"/>
+              <a:srgbClr val="F3F1EA"/>
             </a:bgClr>
           </a:pattFill>
           <a:ln>
@@ -11146,11 +11146,11 @@
             <a:avLst/>
           </a:prstGeom>
           <a:solidFill>
-            <a:srgbClr val="F4F1EA"/>
+            <a:srgbClr val="F3F1EA"/>
           </a:solidFill>
           <a:ln w="19050">
             <a:solidFill>
-              <a:srgbClr val="22371F"/>
+              <a:srgbClr val="1E3F1D"/>
             </a:solidFill>
           </a:ln>
           <a:effectLst/>
@@ -11179,7 +11179,7 @@
       </p:sp>
       <p:pic>
         <p:nvPicPr>
-          <p:cNvPr id="4" name="Picture 3" descr="8872118310774173954.jpg"/>
+          <p:cNvPr id="4" name="Picture 3" descr="9176028890906297722.jpg"/>
           <p:cNvPicPr>
             <a:picLocks noChangeAspect="1"/>
           </p:cNvPicPr>
@@ -11216,7 +11216,7 @@
             <a:avLst/>
           </a:prstGeom>
           <a:solidFill>
-            <a:srgbClr val="156826"/>
+            <a:srgbClr val="31662F"/>
           </a:solidFill>
           <a:ln>
             <a:noFill/>
@@ -11260,7 +11260,7 @@
             <a:avLst/>
           </a:prstGeom>
           <a:solidFill>
-            <a:srgbClr val="156826"/>
+            <a:srgbClr val="31662F"/>
           </a:solidFill>
           <a:ln>
             <a:noFill/>
@@ -11304,7 +11304,7 @@
             <a:avLst/>
           </a:prstGeom>
           <a:solidFill>
-            <a:srgbClr val="156826"/>
+            <a:srgbClr val="31662F"/>
           </a:solidFill>
           <a:ln>
             <a:noFill/>
@@ -11348,7 +11348,7 @@
             <a:avLst/>
           </a:prstGeom>
           <a:solidFill>
-            <a:srgbClr val="156826"/>
+            <a:srgbClr val="31662F"/>
           </a:solidFill>
           <a:ln>
             <a:noFill/>
@@ -11392,7 +11392,7 @@
             <a:avLst/>
           </a:prstGeom>
           <a:solidFill>
-            <a:srgbClr val="156826"/>
+            <a:srgbClr val="31662F"/>
           </a:solidFill>
           <a:ln>
             <a:noFill/>
@@ -11436,7 +11436,7 @@
             <a:avLst/>
           </a:prstGeom>
           <a:solidFill>
-            <a:srgbClr val="156826"/>
+            <a:srgbClr val="31662F"/>
           </a:solidFill>
           <a:ln>
             <a:noFill/>
@@ -11480,7 +11480,7 @@
             <a:avLst/>
           </a:prstGeom>
           <a:solidFill>
-            <a:srgbClr val="156826"/>
+            <a:srgbClr val="31662F"/>
           </a:solidFill>
           <a:ln>
             <a:noFill/>
@@ -11524,7 +11524,7 @@
             <a:avLst/>
           </a:prstGeom>
           <a:solidFill>
-            <a:srgbClr val="156826"/>
+            <a:srgbClr val="31662F"/>
           </a:solidFill>
           <a:ln>
             <a:noFill/>
@@ -11568,7 +11568,7 @@
             <a:avLst/>
           </a:prstGeom>
           <a:solidFill>
-            <a:srgbClr val="156826"/>
+            <a:srgbClr val="31662F"/>
           </a:solidFill>
           <a:ln>
             <a:noFill/>
@@ -11612,7 +11612,7 @@
             <a:avLst/>
           </a:prstGeom>
           <a:solidFill>
-            <a:srgbClr val="156826"/>
+            <a:srgbClr val="31662F"/>
           </a:solidFill>
           <a:ln>
             <a:noFill/>
@@ -11656,7 +11656,7 @@
             <a:avLst/>
           </a:prstGeom>
           <a:solidFill>
-            <a:srgbClr val="156826"/>
+            <a:srgbClr val="31662F"/>
           </a:solidFill>
           <a:ln>
             <a:noFill/>
@@ -11700,7 +11700,7 @@
             <a:avLst/>
           </a:prstGeom>
           <a:solidFill>
-            <a:srgbClr val="156826"/>
+            <a:srgbClr val="31662F"/>
           </a:solidFill>
           <a:ln>
             <a:noFill/>
@@ -11744,7 +11744,7 @@
             <a:avLst/>
           </a:prstGeom>
           <a:solidFill>
-            <a:srgbClr val="156826"/>
+            <a:srgbClr val="31662F"/>
           </a:solidFill>
           <a:ln>
             <a:noFill/>
@@ -11788,7 +11788,7 @@
             <a:avLst/>
           </a:prstGeom>
           <a:solidFill>
-            <a:srgbClr val="156826"/>
+            <a:srgbClr val="31662F"/>
           </a:solidFill>
           <a:ln>
             <a:noFill/>
@@ -11832,7 +11832,7 @@
             <a:avLst/>
           </a:prstGeom>
           <a:solidFill>
-            <a:srgbClr val="156826"/>
+            <a:srgbClr val="31662F"/>
           </a:solidFill>
           <a:ln>
             <a:noFill/>
@@ -11876,7 +11876,7 @@
             <a:avLst/>
           </a:prstGeom>
           <a:solidFill>
-            <a:srgbClr val="156826"/>
+            <a:srgbClr val="31662F"/>
           </a:solidFill>
           <a:ln>
             <a:noFill/>
@@ -11920,7 +11920,7 @@
             <a:avLst/>
           </a:prstGeom>
           <a:solidFill>
-            <a:srgbClr val="F4F1EA"/>
+            <a:srgbClr val="F3F1EA"/>
           </a:solidFill>
           <a:ln>
             <a:noFill/>
@@ -11964,7 +11964,7 @@
             <a:avLst/>
           </a:prstGeom>
           <a:solidFill>
-            <a:srgbClr val="F4F1EA"/>
+            <a:srgbClr val="F3F1EA"/>
           </a:solidFill>
           <a:ln>
             <a:noFill/>
@@ -12008,7 +12008,7 @@
             <a:avLst/>
           </a:prstGeom>
           <a:solidFill>
-            <a:srgbClr val="F4F1EA"/>
+            <a:srgbClr val="F3F1EA"/>
           </a:solidFill>
           <a:ln>
             <a:noFill/>
@@ -12052,7 +12052,7 @@
             <a:avLst/>
           </a:prstGeom>
           <a:solidFill>
-            <a:srgbClr val="F4F1EA"/>
+            <a:srgbClr val="F3F1EA"/>
           </a:solidFill>
           <a:ln>
             <a:noFill/>
@@ -12096,7 +12096,7 @@
             <a:avLst/>
           </a:prstGeom>
           <a:solidFill>
-            <a:srgbClr val="F4F1EA"/>
+            <a:srgbClr val="F3F1EA"/>
           </a:solidFill>
           <a:ln>
             <a:noFill/>
@@ -12140,7 +12140,7 @@
             <a:avLst/>
           </a:prstGeom>
           <a:solidFill>
-            <a:srgbClr val="F4F1EA"/>
+            <a:srgbClr val="F3F1EA"/>
           </a:solidFill>
           <a:ln>
             <a:noFill/>
@@ -12184,7 +12184,7 @@
             <a:avLst/>
           </a:prstGeom>
           <a:solidFill>
-            <a:srgbClr val="F4F1EA"/>
+            <a:srgbClr val="F3F1EA"/>
           </a:solidFill>
           <a:ln>
             <a:noFill/>
@@ -12228,7 +12228,7 @@
             <a:avLst/>
           </a:prstGeom>
           <a:solidFill>
-            <a:srgbClr val="F4F1EA"/>
+            <a:srgbClr val="F3F1EA"/>
           </a:solidFill>
           <a:ln>
             <a:noFill/>
@@ -12272,7 +12272,7 @@
             <a:avLst/>
           </a:prstGeom>
           <a:solidFill>
-            <a:srgbClr val="F4F1EA"/>
+            <a:srgbClr val="F3F1EA"/>
           </a:solidFill>
           <a:ln>
             <a:noFill/>
@@ -12316,7 +12316,7 @@
             <a:avLst/>
           </a:prstGeom>
           <a:solidFill>
-            <a:srgbClr val="F4F1EA"/>
+            <a:srgbClr val="F3F1EA"/>
           </a:solidFill>
           <a:ln>
             <a:noFill/>
@@ -12360,7 +12360,7 @@
             <a:avLst/>
           </a:prstGeom>
           <a:solidFill>
-            <a:srgbClr val="F4F1EA"/>
+            <a:srgbClr val="F3F1EA"/>
           </a:solidFill>
           <a:ln>
             <a:noFill/>
@@ -12404,7 +12404,7 @@
             <a:avLst/>
           </a:prstGeom>
           <a:solidFill>
-            <a:srgbClr val="F4F1EA"/>
+            <a:srgbClr val="F3F1EA"/>
           </a:solidFill>
           <a:ln>
             <a:noFill/>
@@ -12448,7 +12448,7 @@
             <a:avLst/>
           </a:prstGeom>
           <a:solidFill>
-            <a:srgbClr val="F4F1EA"/>
+            <a:srgbClr val="F3F1EA"/>
           </a:solidFill>
           <a:ln>
             <a:noFill/>
@@ -12492,7 +12492,7 @@
             <a:avLst/>
           </a:prstGeom>
           <a:solidFill>
-            <a:srgbClr val="F4F1EA"/>
+            <a:srgbClr val="F3F1EA"/>
           </a:solidFill>
           <a:ln>
             <a:noFill/>
@@ -12536,7 +12536,7 @@
             <a:avLst/>
           </a:prstGeom>
           <a:solidFill>
-            <a:srgbClr val="F4F1EA"/>
+            <a:srgbClr val="F3F1EA"/>
           </a:solidFill>
           <a:ln>
             <a:noFill/>
@@ -12580,7 +12580,7 @@
             <a:avLst/>
           </a:prstGeom>
           <a:solidFill>
-            <a:srgbClr val="F4F1EA"/>
+            <a:srgbClr val="F3F1EA"/>
           </a:solidFill>
           <a:ln>
             <a:noFill/>
@@ -12624,7 +12624,7 @@
             <a:avLst/>
           </a:prstGeom>
           <a:solidFill>
-            <a:srgbClr val="F4F1EA"/>
+            <a:srgbClr val="F3F1EA"/>
           </a:solidFill>
           <a:ln>
             <a:noFill/>
@@ -12707,7 +12707,7 @@
             <a:r>
               <a:rPr sz="2000" b="1" i="0" spc="200">
                 <a:solidFill>
-                  <a:srgbClr val="156826"/>
+                  <a:srgbClr val="31662F"/>
                 </a:solidFill>
                 <a:latin typeface="Montserrat"/>
               </a:rPr>
@@ -12785,7 +12785,7 @@
             <a:r>
               <a:rPr sz="2000" b="1" i="0" spc="200">
                 <a:solidFill>
-                  <a:srgbClr val="156826"/>
+                  <a:srgbClr val="31662F"/>
                 </a:solidFill>
                 <a:latin typeface="Montserrat"/>
               </a:rPr>
@@ -12863,7 +12863,7 @@
             <a:r>
               <a:rPr sz="2000" b="1" i="0" spc="200">
                 <a:solidFill>
-                  <a:srgbClr val="156826"/>
+                  <a:srgbClr val="31662F"/>
                 </a:solidFill>
                 <a:latin typeface="Montserrat"/>
               </a:rPr>
@@ -12941,7 +12941,7 @@
             <a:r>
               <a:rPr sz="2000" b="1" i="0" spc="200">
                 <a:solidFill>
-                  <a:srgbClr val="156826"/>
+                  <a:srgbClr val="31662F"/>
                 </a:solidFill>
                 <a:latin typeface="Montserrat"/>
               </a:rPr>
@@ -13031,7 +13031,7 @@
             </a:pathLst>
           </a:custGeom>
           <a:solidFill>
-            <a:srgbClr val="156826"/>
+            <a:srgbClr val="31662F"/>
           </a:solidFill>
           <a:ln>
             <a:noFill/>
@@ -13090,7 +13090,7 @@
             <a:r>
               <a:rPr sz="5000" b="1" i="0">
                 <a:solidFill>
-                  <a:srgbClr val="F4F1EA"/>
+                  <a:srgbClr val="F3F1EA"/>
                 </a:solidFill>
                 <a:latin typeface="Montserrat"/>
               </a:rPr>
@@ -13141,7 +13141,7 @@
             </a:pathLst>
           </a:custGeom>
           <a:solidFill>
-            <a:srgbClr val="22371F"/>
+            <a:srgbClr val="1E3F1D"/>
           </a:solidFill>
           <a:ln>
             <a:noFill/>
@@ -13200,7 +13200,7 @@
             <a:r>
               <a:rPr sz="2800" b="0" i="0">
                 <a:solidFill>
-                  <a:srgbClr val="DBE6A7"/>
+                  <a:srgbClr val="B1BCB1"/>
                 </a:solidFill>
                 <a:latin typeface="Source Sans 3"/>
               </a:rPr>
@@ -13224,7 +13224,7 @@
             <a:avLst/>
           </a:prstGeom>
           <a:solidFill>
-            <a:srgbClr val="4F3433"/>
+            <a:srgbClr val="4C3634"/>
           </a:solidFill>
           <a:ln>
             <a:noFill/>
@@ -13283,7 +13283,7 @@
             <a:r>
               <a:rPr sz="1800" b="0" i="0">
                 <a:solidFill>
-                  <a:srgbClr val="F4F1EA"/>
+                  <a:srgbClr val="F3F1EA"/>
                 </a:solidFill>
                 <a:latin typeface="Source Sans 3"/>
               </a:rPr>
@@ -13322,7 +13322,7 @@
             <a:r>
               <a:rPr sz="2000" b="0" i="0">
                 <a:solidFill>
-                  <a:srgbClr val="F4F1EA">
+                  <a:srgbClr val="F3F1EA">
                     <a:alpha val="60000"/>
                   </a:srgbClr>
                 </a:solidFill>
@@ -13347,7 +13347,7 @@
     <p:bg>
       <p:bgPr>
         <a:solidFill>
-          <a:srgbClr val="22371F"/>
+          <a:srgbClr val="1E3F1D"/>
         </a:solidFill>
         <a:effectLst/>
       </p:bgPr>
@@ -13380,7 +13380,7 @@
               <a:srgbClr val="E8E2D4"/>
             </a:fgClr>
             <a:bgClr>
-              <a:srgbClr val="F4F1EA"/>
+              <a:srgbClr val="F3F1EA"/>
             </a:bgClr>
           </a:pattFill>
           <a:ln>
@@ -13431,11 +13431,11 @@
             <a:avLst/>
           </a:prstGeom>
           <a:solidFill>
-            <a:srgbClr val="F4F1EA"/>
+            <a:srgbClr val="F3F1EA"/>
           </a:solidFill>
           <a:ln w="19050">
             <a:solidFill>
-              <a:srgbClr val="22371F"/>
+              <a:srgbClr val="1E3F1D"/>
             </a:solidFill>
           </a:ln>
           <a:effectLst/>
@@ -13560,7 +13560,7 @@
             <a:avLst/>
           </a:prstGeom>
           <a:solidFill>
-            <a:srgbClr val="156826"/>
+            <a:srgbClr val="31662F"/>
           </a:solidFill>
           <a:ln>
             <a:noFill/>
@@ -13604,7 +13604,7 @@
             <a:avLst/>
           </a:prstGeom>
           <a:solidFill>
-            <a:srgbClr val="156826"/>
+            <a:srgbClr val="31662F"/>
           </a:solidFill>
           <a:ln>
             <a:noFill/>
@@ -13648,7 +13648,7 @@
             <a:avLst/>
           </a:prstGeom>
           <a:solidFill>
-            <a:srgbClr val="156826"/>
+            <a:srgbClr val="31662F"/>
           </a:solidFill>
           <a:ln>
             <a:noFill/>
@@ -13692,7 +13692,7 @@
             <a:avLst/>
           </a:prstGeom>
           <a:solidFill>
-            <a:srgbClr val="156826"/>
+            <a:srgbClr val="31662F"/>
           </a:solidFill>
           <a:ln>
             <a:noFill/>
@@ -13736,7 +13736,7 @@
             <a:avLst/>
           </a:prstGeom>
           <a:solidFill>
-            <a:srgbClr val="156826"/>
+            <a:srgbClr val="31662F"/>
           </a:solidFill>
           <a:ln>
             <a:noFill/>
@@ -13780,7 +13780,7 @@
             <a:avLst/>
           </a:prstGeom>
           <a:solidFill>
-            <a:srgbClr val="156826"/>
+            <a:srgbClr val="31662F"/>
           </a:solidFill>
           <a:ln>
             <a:noFill/>
@@ -13824,7 +13824,7 @@
             <a:avLst/>
           </a:prstGeom>
           <a:solidFill>
-            <a:srgbClr val="156826"/>
+            <a:srgbClr val="31662F"/>
           </a:solidFill>
           <a:ln>
             <a:noFill/>
@@ -13868,7 +13868,7 @@
             <a:avLst/>
           </a:prstGeom>
           <a:solidFill>
-            <a:srgbClr val="156826"/>
+            <a:srgbClr val="31662F"/>
           </a:solidFill>
           <a:ln>
             <a:noFill/>
@@ -13912,7 +13912,7 @@
             <a:avLst/>
           </a:prstGeom>
           <a:solidFill>
-            <a:srgbClr val="156826"/>
+            <a:srgbClr val="31662F"/>
           </a:solidFill>
           <a:ln>
             <a:noFill/>
@@ -13956,7 +13956,7 @@
             <a:avLst/>
           </a:prstGeom>
           <a:solidFill>
-            <a:srgbClr val="156826"/>
+            <a:srgbClr val="31662F"/>
           </a:solidFill>
           <a:ln>
             <a:noFill/>
@@ -14000,7 +14000,7 @@
             <a:avLst/>
           </a:prstGeom>
           <a:solidFill>
-            <a:srgbClr val="156826"/>
+            <a:srgbClr val="31662F"/>
           </a:solidFill>
           <a:ln>
             <a:noFill/>
@@ -14044,7 +14044,7 @@
             <a:avLst/>
           </a:prstGeom>
           <a:solidFill>
-            <a:srgbClr val="156826"/>
+            <a:srgbClr val="31662F"/>
           </a:solidFill>
           <a:ln>
             <a:noFill/>
@@ -14088,7 +14088,7 @@
             <a:avLst/>
           </a:prstGeom>
           <a:solidFill>
-            <a:srgbClr val="156826"/>
+            <a:srgbClr val="31662F"/>
           </a:solidFill>
           <a:ln>
             <a:noFill/>
@@ -14132,7 +14132,7 @@
             <a:avLst/>
           </a:prstGeom>
           <a:solidFill>
-            <a:srgbClr val="156826"/>
+            <a:srgbClr val="31662F"/>
           </a:solidFill>
           <a:ln>
             <a:noFill/>
@@ -14176,7 +14176,7 @@
             <a:avLst/>
           </a:prstGeom>
           <a:solidFill>
-            <a:srgbClr val="156826"/>
+            <a:srgbClr val="31662F"/>
           </a:solidFill>
           <a:ln>
             <a:noFill/>
@@ -14220,7 +14220,7 @@
             <a:avLst/>
           </a:prstGeom>
           <a:solidFill>
-            <a:srgbClr val="156826"/>
+            <a:srgbClr val="31662F"/>
           </a:solidFill>
           <a:ln>
             <a:noFill/>
@@ -14264,7 +14264,7 @@
             <a:avLst/>
           </a:prstGeom>
           <a:solidFill>
-            <a:srgbClr val="F4F1EA"/>
+            <a:srgbClr val="F3F1EA"/>
           </a:solidFill>
           <a:ln>
             <a:noFill/>
@@ -14308,7 +14308,7 @@
             <a:avLst/>
           </a:prstGeom>
           <a:solidFill>
-            <a:srgbClr val="F4F1EA"/>
+            <a:srgbClr val="F3F1EA"/>
           </a:solidFill>
           <a:ln>
             <a:noFill/>
@@ -14352,7 +14352,7 @@
             <a:avLst/>
           </a:prstGeom>
           <a:solidFill>
-            <a:srgbClr val="F4F1EA"/>
+            <a:srgbClr val="F3F1EA"/>
           </a:solidFill>
           <a:ln>
             <a:noFill/>
@@ -14396,7 +14396,7 @@
             <a:avLst/>
           </a:prstGeom>
           <a:solidFill>
-            <a:srgbClr val="F4F1EA"/>
+            <a:srgbClr val="F3F1EA"/>
           </a:solidFill>
           <a:ln>
             <a:noFill/>
@@ -14440,7 +14440,7 @@
             <a:avLst/>
           </a:prstGeom>
           <a:solidFill>
-            <a:srgbClr val="F4F1EA"/>
+            <a:srgbClr val="F3F1EA"/>
           </a:solidFill>
           <a:ln>
             <a:noFill/>
@@ -14484,7 +14484,7 @@
             <a:avLst/>
           </a:prstGeom>
           <a:solidFill>
-            <a:srgbClr val="F4F1EA"/>
+            <a:srgbClr val="F3F1EA"/>
           </a:solidFill>
           <a:ln>
             <a:noFill/>
@@ -14528,7 +14528,7 @@
             <a:avLst/>
           </a:prstGeom>
           <a:solidFill>
-            <a:srgbClr val="F4F1EA"/>
+            <a:srgbClr val="F3F1EA"/>
           </a:solidFill>
           <a:ln>
             <a:noFill/>
@@ -14572,7 +14572,7 @@
             <a:avLst/>
           </a:prstGeom>
           <a:solidFill>
-            <a:srgbClr val="F4F1EA"/>
+            <a:srgbClr val="F3F1EA"/>
           </a:solidFill>
           <a:ln>
             <a:noFill/>
@@ -14616,7 +14616,7 @@
             <a:avLst/>
           </a:prstGeom>
           <a:solidFill>
-            <a:srgbClr val="F4F1EA"/>
+            <a:srgbClr val="F3F1EA"/>
           </a:solidFill>
           <a:ln>
             <a:noFill/>
@@ -14660,7 +14660,7 @@
             <a:avLst/>
           </a:prstGeom>
           <a:solidFill>
-            <a:srgbClr val="F4F1EA"/>
+            <a:srgbClr val="F3F1EA"/>
           </a:solidFill>
           <a:ln>
             <a:noFill/>
@@ -14704,7 +14704,7 @@
             <a:avLst/>
           </a:prstGeom>
           <a:solidFill>
-            <a:srgbClr val="F4F1EA"/>
+            <a:srgbClr val="F3F1EA"/>
           </a:solidFill>
           <a:ln>
             <a:noFill/>
@@ -14748,7 +14748,7 @@
             <a:avLst/>
           </a:prstGeom>
           <a:solidFill>
-            <a:srgbClr val="F4F1EA"/>
+            <a:srgbClr val="F3F1EA"/>
           </a:solidFill>
           <a:ln>
             <a:noFill/>
@@ -14792,7 +14792,7 @@
             <a:avLst/>
           </a:prstGeom>
           <a:solidFill>
-            <a:srgbClr val="F4F1EA"/>
+            <a:srgbClr val="F3F1EA"/>
           </a:solidFill>
           <a:ln>
             <a:noFill/>
@@ -14836,7 +14836,7 @@
             <a:avLst/>
           </a:prstGeom>
           <a:solidFill>
-            <a:srgbClr val="F4F1EA"/>
+            <a:srgbClr val="F3F1EA"/>
           </a:solidFill>
           <a:ln>
             <a:noFill/>
@@ -14880,7 +14880,7 @@
             <a:avLst/>
           </a:prstGeom>
           <a:solidFill>
-            <a:srgbClr val="F4F1EA"/>
+            <a:srgbClr val="F3F1EA"/>
           </a:solidFill>
           <a:ln>
             <a:noFill/>
@@ -14924,7 +14924,7 @@
             <a:avLst/>
           </a:prstGeom>
           <a:solidFill>
-            <a:srgbClr val="F4F1EA"/>
+            <a:srgbClr val="F3F1EA"/>
           </a:solidFill>
           <a:ln>
             <a:noFill/>
@@ -14968,7 +14968,7 @@
             <a:avLst/>
           </a:prstGeom>
           <a:solidFill>
-            <a:srgbClr val="F4F1EA"/>
+            <a:srgbClr val="F3F1EA"/>
           </a:solidFill>
           <a:ln>
             <a:noFill/>
@@ -15051,7 +15051,7 @@
             <a:r>
               <a:rPr sz="2000" b="1" i="0" spc="200">
                 <a:solidFill>
-                  <a:srgbClr val="156826"/>
+                  <a:srgbClr val="31662F"/>
                 </a:solidFill>
                 <a:latin typeface="Montserrat"/>
               </a:rPr>
@@ -15129,7 +15129,7 @@
             <a:r>
               <a:rPr sz="2000" b="1" i="0" spc="200">
                 <a:solidFill>
-                  <a:srgbClr val="156826"/>
+                  <a:srgbClr val="31662F"/>
                 </a:solidFill>
                 <a:latin typeface="Montserrat"/>
               </a:rPr>
@@ -15207,7 +15207,7 @@
             <a:r>
               <a:rPr sz="2000" b="1" i="0" spc="200">
                 <a:solidFill>
-                  <a:srgbClr val="156826"/>
+                  <a:srgbClr val="31662F"/>
                 </a:solidFill>
                 <a:latin typeface="Montserrat"/>
               </a:rPr>
@@ -15285,7 +15285,7 @@
             <a:r>
               <a:rPr sz="2000" b="1" i="0" spc="200">
                 <a:solidFill>
-                  <a:srgbClr val="156826"/>
+                  <a:srgbClr val="31662F"/>
                 </a:solidFill>
                 <a:latin typeface="Montserrat"/>
               </a:rPr>
@@ -15375,7 +15375,7 @@
             </a:pathLst>
           </a:custGeom>
           <a:solidFill>
-            <a:srgbClr val="156826"/>
+            <a:srgbClr val="31662F"/>
           </a:solidFill>
           <a:ln>
             <a:noFill/>
@@ -15434,7 +15434,7 @@
             <a:r>
               <a:rPr sz="3800" b="1" i="0">
                 <a:solidFill>
-                  <a:srgbClr val="F4F1EA"/>
+                  <a:srgbClr val="F3F1EA"/>
                 </a:solidFill>
                 <a:latin typeface="Montserrat"/>
               </a:rPr>
@@ -15485,7 +15485,7 @@
             </a:pathLst>
           </a:custGeom>
           <a:solidFill>
-            <a:srgbClr val="22371F"/>
+            <a:srgbClr val="1E3F1D"/>
           </a:solidFill>
           <a:ln>
             <a:noFill/>
@@ -15544,7 +15544,7 @@
             <a:r>
               <a:rPr sz="2800" b="0" i="0">
                 <a:solidFill>
-                  <a:srgbClr val="DBE6A7"/>
+                  <a:srgbClr val="B1BCB1"/>
                 </a:solidFill>
                 <a:latin typeface="Source Sans 3"/>
               </a:rPr>
@@ -15568,7 +15568,7 @@
             <a:avLst/>
           </a:prstGeom>
           <a:solidFill>
-            <a:srgbClr val="4F3433"/>
+            <a:srgbClr val="4C3634"/>
           </a:solidFill>
           <a:ln>
             <a:noFill/>
@@ -15627,7 +15627,7 @@
             <a:r>
               <a:rPr sz="1800" b="0" i="0">
                 <a:solidFill>
-                  <a:srgbClr val="F4F1EA"/>
+                  <a:srgbClr val="F3F1EA"/>
                 </a:solidFill>
                 <a:latin typeface="Source Sans 3"/>
               </a:rPr>
@@ -15666,7 +15666,7 @@
             <a:r>
               <a:rPr sz="2000" b="0" i="0">
                 <a:solidFill>
-                  <a:srgbClr val="F4F1EA">
+                  <a:srgbClr val="F3F1EA">
                     <a:alpha val="60000"/>
                   </a:srgbClr>
                 </a:solidFill>
@@ -15691,7 +15691,7 @@
     <p:bg>
       <p:bgPr>
         <a:solidFill>
-          <a:srgbClr val="22371F"/>
+          <a:srgbClr val="1E3F1D"/>
         </a:solidFill>
         <a:effectLst/>
       </p:bgPr>
@@ -15733,7 +15733,7 @@
             <a:r>
               <a:rPr sz="5600" b="1" i="0">
                 <a:solidFill>
-                  <a:srgbClr val="F4F1EA"/>
+                  <a:srgbClr val="F3F1EA"/>
                 </a:solidFill>
                 <a:latin typeface="Montserrat"/>
               </a:rPr>
@@ -15763,7 +15763,7 @@
               <a:srgbClr val="E8E2D4"/>
             </a:fgClr>
             <a:bgClr>
-              <a:srgbClr val="F4F1EA"/>
+              <a:srgbClr val="F3F1EA"/>
             </a:bgClr>
           </a:pattFill>
           <a:ln>
@@ -15820,7 +15820,7 @@
               <a:srgbClr val="E8E2D4"/>
             </a:fgClr>
             <a:bgClr>
-              <a:srgbClr val="F4F1EA"/>
+              <a:srgbClr val="F3F1EA"/>
             </a:bgClr>
           </a:pattFill>
           <a:ln>
@@ -15877,7 +15877,7 @@
               <a:srgbClr val="E8E2D4"/>
             </a:fgClr>
             <a:bgClr>
-              <a:srgbClr val="F4F1EA"/>
+              <a:srgbClr val="F3F1EA"/>
             </a:bgClr>
           </a:pattFill>
           <a:ln>
@@ -15943,7 +15943,7 @@
             <a:r>
               <a:rPr sz="2000" b="0" i="0">
                 <a:solidFill>
-                  <a:srgbClr val="F4F1EA">
+                  <a:srgbClr val="F3F1EA">
                     <a:alpha val="60000"/>
                   </a:srgbClr>
                 </a:solidFill>
